--- a/it/slides/19-Architettura_dei_Calcolatori-Istruzioni_e_Interruzioni-Codice.pptx
+++ b/it/slides/19-Architettura_dei_Calcolatori-Istruzioni_e_Interruzioni-Codice.pptx
@@ -125,22 +125,34 @@
   <p:extLst>
     <p:ext uri="{521415D9-36F7-43E2-AB2F-B90AF26B5E84}">
       <p14:sectionLst xmlns:p14="http://schemas.microsoft.com/office/powerpoint/2010/main">
-        <p14:section name="Apertura" id="{0e7a56ee-c306-57f8-04a0-64c76faaf3ee}">
+        <p14:section name="Apertura" id="{16558db1-f6ae-74c1-89d1-424bac9fe479}">
           <p14:sldIdLst>
             <p14:sldId id="256"/>
             <p14:sldId id="257"/>
           </p14:sldIdLst>
         </p14:section>
-        <p14:section name="I listati" id="{5c6dd9c4-9033-652b-d9a0-71aec9c75455}">
+        <p14:section name="Riscaldamento sulla macchina" id="{6b99afa9-4f83-1391-ac32-07063b374d36}">
           <p14:sldIdLst>
             <p14:sldId id="258"/>
+          </p14:sldIdLst>
+        </p14:section>
+        <p14:section name="Istruzioni" id="{d663485a-37ef-b615-c2c1-b621a1ec41c8}">
+          <p14:sldIdLst>
             <p14:sldId id="259"/>
+          </p14:sldIdLst>
+        </p14:section>
+        <p14:section name="Il ciclo del processore" id="{aa939bac-67af-d7f8-ac99-5f3e08fa2c25}">
+          <p14:sldIdLst>
             <p14:sldId id="260"/>
             <p14:sldId id="261"/>
+          </p14:sldIdLst>
+        </p14:section>
+        <p14:section name="La soluzione di RISC-V" id="{c7e2b6c7-e307-8c35-21e4-2e42cda9dde1}">
+          <p14:sldIdLst>
             <p14:sldId id="262"/>
           </p14:sldIdLst>
         </p14:section>
-        <p14:section name="Il programma completo" id="{b8b10b8a-ba03-a4ca-68ab-c3898720d69a}">
+        <p14:section name="Il programma completo" id="{ef7f4214-bbe9-bd0f-1791-62354a34c383}">
           <p14:sldIdLst>
             <p14:sldId id="263"/>
             <p14:sldId id="264"/>
@@ -150,7 +162,7 @@
             <p14:sldId id="268"/>
           </p14:sldIdLst>
         </p14:section>
-        <p14:section name="Eseguire e provare" id="{3e300c17-f9eb-befd-daa2-5a9f4a9526b6}">
+        <p14:section name="Eseguire e provare" id="{b0607539-d503-53ee-9487-2ff04690698c}">
           <p14:sldIdLst>
             <p14:sldId id="269"/>
             <p14:sldId id="270"/>
@@ -159,7 +171,7 @@
             <p14:sldId id="273"/>
           </p14:sldIdLst>
         </p14:section>
-        <p14:section name="Esercizi" id="{c89faf8c-c4f1-a9af-31e1-9d370de9a842}">
+        <p14:section name="Esercizi" id="{5b170be9-a297-b82d-e685-0264b5ced889}">
           <p14:sldIdLst>
             <p14:sldId id="274"/>
           </p14:sldIdLst>
@@ -3144,7 +3156,63 @@
       </p:sp>
       <p:sp>
         <p:nvSpPr>
-          <p:cNvPr id="11" name="Shape 9"/>
+          <p:cNvPr id="11" name="Text 9"/>
+          <p:cNvSpPr txBox="1"/>
+          <p:nvPr/>
+        </p:nvSpPr>
+        <p:spPr>
+          <a:xfrm>
+            <a:off x="4693615" y="566928"/>
+            <a:ext cx="6949440" cy="640080"/>
+          </a:xfrm>
+          <a:prstGeom prst="rect">
+            <a:avLst/>
+          </a:prstGeom>
+          <a:noFill/>
+          <a:ln/>
+        </p:spPr>
+        <p:txBody>
+          <a:bodyPr wrap="square" lIns="0" tIns="0" rIns="0" bIns="0" rtlCol="0" anchor="t"/>
+          <a:lstStyle/>
+          <a:p>
+            <a:pPr algn="r" indent="0" marL="0">
+              <a:buNone/>
+            </a:pPr>
+            <a:r>
+              <a:rPr lang="en-US" sz="1300" dirty="0">
+                <a:solidFill>
+                  <a:srgbClr val="CFE3EA"/>
+                </a:solidFill>
+                <a:latin typeface="Calibri" pitchFamily="34" charset="0"/>
+                <a:ea typeface="Calibri" pitchFamily="34" charset="-122"/>
+                <a:cs typeface="Calibri" pitchFamily="34" charset="-120"/>
+              </a:rPr>
+              <a:t>Presentazione del codice. I concetti, le figure e le domande sono nella presentazione della lezione:</a:t>
+            </a:r>
+            <a:endParaRPr lang="en-US" sz="1300" dirty="0"/>
+          </a:p>
+          <a:p>
+            <a:pPr algn="r" indent="0" marL="0">
+              <a:buNone/>
+            </a:pPr>
+            <a:r>
+              <a:rPr lang="en-US" sz="1300" dirty="0">
+                <a:solidFill>
+                  <a:srgbClr val="CFE3EA"/>
+                </a:solidFill>
+                <a:latin typeface="Calibri" pitchFamily="34" charset="0"/>
+                <a:ea typeface="Calibri" pitchFamily="34" charset="-122"/>
+                <a:cs typeface="Calibri" pitchFamily="34" charset="-120"/>
+              </a:rPr>
+              <a:t>19-Architettura_dei_Calcolatori-Istruzioni_e_Interruzioni.pptx</a:t>
+            </a:r>
+            <a:endParaRPr lang="en-US" sz="1300" dirty="0"/>
+          </a:p>
+        </p:txBody>
+      </p:sp>
+      <p:sp>
+        <p:nvSpPr>
+          <p:cNvPr id="12" name="Shape 10"/>
           <p:cNvSpPr/>
           <p:nvPr/>
         </p:nvSpPr>
@@ -3171,7 +3239,7 @@
       </p:sp>
       <p:pic>
         <p:nvPicPr>
-          <p:cNvPr id="12" name="Image 0" descr="/Users/raffaelemontella/devel/riscv-prg32/computer-architecture-with-prg32/tools/assets/game_asteroids.png">    </p:cNvPr>
+          <p:cNvPr id="13" name="Image 0" descr="/Users/raffaelemontella/devel/riscv-prg32/computer-architecture-with-prg32/tools/assets/game_asteroids.png">    </p:cNvPr>
           <p:cNvPicPr>
             <a:picLocks noChangeAspect="1"/>
           </p:cNvPicPr>

--- a/it/slides/19-Architettura_dei_Calcolatori-Istruzioni_e_Interruzioni-Codice.pptx
+++ b/it/slides/19-Architettura_dei_Calcolatori-Istruzioni_e_Interruzioni-Codice.pptx
@@ -125,34 +125,34 @@
   <p:extLst>
     <p:ext uri="{521415D9-36F7-43E2-AB2F-B90AF26B5E84}">
       <p14:sectionLst xmlns:p14="http://schemas.microsoft.com/office/powerpoint/2010/main">
-        <p14:section name="Apertura" id="{16558db1-f6ae-74c1-89d1-424bac9fe479}">
+        <p14:section name="Apertura" id="{02aae241-700b-d46a-e7ae-7897728b4ad5}">
           <p14:sldIdLst>
             <p14:sldId id="256"/>
             <p14:sldId id="257"/>
           </p14:sldIdLst>
         </p14:section>
-        <p14:section name="Riscaldamento sulla macchina" id="{6b99afa9-4f83-1391-ac32-07063b374d36}">
+        <p14:section name="Riscaldamento sulla macchina" id="{2c3ccb28-0adb-af94-a831-da66f0069684}">
           <p14:sldIdLst>
             <p14:sldId id="258"/>
           </p14:sldIdLst>
         </p14:section>
-        <p14:section name="Istruzioni" id="{d663485a-37ef-b615-c2c1-b621a1ec41c8}">
+        <p14:section name="Istruzioni" id="{2dd6e6e3-b3ea-29c7-f2ae-a1dc083a25fd}">
           <p14:sldIdLst>
             <p14:sldId id="259"/>
           </p14:sldIdLst>
         </p14:section>
-        <p14:section name="Il ciclo del processore" id="{aa939bac-67af-d7f8-ac99-5f3e08fa2c25}">
+        <p14:section name="Il ciclo del processore" id="{fb954b71-8617-7bc5-7a66-64cfb2701fc8}">
           <p14:sldIdLst>
             <p14:sldId id="260"/>
             <p14:sldId id="261"/>
           </p14:sldIdLst>
         </p14:section>
-        <p14:section name="La soluzione di RISC-V" id="{c7e2b6c7-e307-8c35-21e4-2e42cda9dde1}">
+        <p14:section name="La soluzione di RISC-V" id="{1060664a-ecc9-944a-e31c-c779992ceb57}">
           <p14:sldIdLst>
             <p14:sldId id="262"/>
           </p14:sldIdLst>
         </p14:section>
-        <p14:section name="Il programma completo" id="{ef7f4214-bbe9-bd0f-1791-62354a34c383}">
+        <p14:section name="Il programma completo" id="{862c38c0-4ac1-3a4b-b3a7-9409406729a5}">
           <p14:sldIdLst>
             <p14:sldId id="263"/>
             <p14:sldId id="264"/>
@@ -162,7 +162,7 @@
             <p14:sldId id="268"/>
           </p14:sldIdLst>
         </p14:section>
-        <p14:section name="Eseguire e provare" id="{b0607539-d503-53ee-9487-2ff04690698c}">
+        <p14:section name="Eseguire e provare" id="{c088a353-c8f8-5e87-88dc-c3d2d4e9a123}">
           <p14:sldIdLst>
             <p14:sldId id="269"/>
             <p14:sldId id="270"/>
@@ -171,7 +171,7 @@
             <p14:sldId id="273"/>
           </p14:sldIdLst>
         </p14:section>
-        <p14:section name="Esercizi" id="{5b170be9-a297-b82d-e685-0264b5ced889}">
+        <p14:section name="Esercizi" id="{9a955ecb-48a3-0e32-cda0-4066cd989164}">
           <p14:sldIdLst>
             <p14:sldId id="274"/>
           </p14:sldIdLst>
@@ -580,7 +580,9 @@
           <a:p>
             <a:r>
               <a:rPr lang="en-US" dirty="0"/>
-              <a:t>Questa è la presentazione del codice della Lezione 19. La presentazione della lezione contiene i concetti; questa contiene tutto ciò che si scrive e si esegue: i listati con la loro spiegazione, il programma completo, che cosa mostra, e il modo di provarlo su ciascuno dei tre host.</a:t>
+              <a:t>Questa è la presentazione del codice della Lezione 19. La presentazione della lezione contiene i concetti; questa contiene tutto ciò che si scrive e si esegue: i listati con la loro spiegazione, il programma completo, che cosa mostra, e il modo di provarlo su ciascuno dei tre host.
+Stato di apprendimento: DA COMPRENDERE OGGI, alla fine di questa lezione lo spiegate, lo seguite passo passo e lo applicate da soli; DA UTILIZZARE OGGI, oggi seguite e usate la ricetta; come funziona dentro si spiega più avanti, o non fa parte del corso; DA COMPRENDERE PIÙ AVANTI, riconoscete il nome e lo scopo; lo spiega una lezione successiva. Una slide senza etichetta è contesto: una storia, un esempio, una domanda, un esercizio.
+Stato di apprendimento di questa lezione. DA COMPRENDERE OGGI: formati delle istruzioni; i modi di indirizzamento; il ciclo del processore; interruzioni e trap. DA UTILIZZARE OGGI: il programma completo, gli strumenti di PRG32 (si usa, non si studia, in questo corso). DA COMPRENDERE PIÙ AVANTI: niente. Una slide senza etichetta è contesto: una storia, un esempio, una domanda, un esercizio.</a:t>
             </a:r>
             <a:endParaRPr lang="en-US" dirty="0"/>
           </a:p>
@@ -669,6 +671,7 @@
             <a:r>
               <a:rPr lang="en-US" dirty="0"/>
               <a:t>Una pagina del programma completo, esattamente com'è nel repository. Leggetelo dall'inizio: l'intestazione dice che cosa mostra il programma e come compilarlo; seguono le tre funzioni init, update e draw, poi i dati. Le righe incontrate nei listati della lezione hanno qui gli stessi commenti.
+DA UTILIZZARE OGGI: il programma completo (si usa, non si studia, in questo corso).
 Per il docente: code/l19.S, come viene compilato ed eseguito dai test. I commenti fanno parte del programma, e sono in inglese come in tutti i listati: leggeteli con il codice.</a:t>
             </a:r>
             <a:endParaRPr lang="en-US" dirty="0"/>
@@ -758,6 +761,7 @@
             <a:r>
               <a:rPr lang="en-US" dirty="0"/>
               <a:t>Una pagina del programma completo, esattamente com'è nel repository. Leggetelo dall'inizio: l'intestazione dice che cosa mostra il programma e come compilarlo; seguono le tre funzioni init, update e draw, poi i dati. Le righe incontrate nei listati della lezione hanno qui gli stessi commenti.
+DA UTILIZZARE OGGI: il programma completo (si usa, non si studia, in questo corso).
 Per il docente: code/l19.S, come viene compilato ed eseguito dai test. I commenti fanno parte del programma, e sono in inglese come in tutti i listati: leggeteli con il codice.</a:t>
             </a:r>
             <a:endParaRPr lang="en-US" dirty="0"/>
@@ -847,6 +851,7 @@
             <a:r>
               <a:rPr lang="en-US" dirty="0"/>
               <a:t>Una pagina del programma completo, esattamente com'è nel repository. Leggetelo dall'inizio: l'intestazione dice che cosa mostra il programma e come compilarlo; seguono le tre funzioni init, update e draw, poi i dati. Le righe incontrate nei listati della lezione hanno qui gli stessi commenti.
+DA UTILIZZARE OGGI: il programma completo (si usa, non si studia, in questo corso).
 Per il docente: code/l19.S, come viene compilato ed eseguito dai test. I commenti fanno parte del programma, e sono in inglese come in tutti i listati: leggeteli con il codice.</a:t>
             </a:r>
             <a:endParaRPr lang="en-US" dirty="0"/>
@@ -936,6 +941,7 @@
             <a:r>
               <a:rPr lang="en-US" dirty="0"/>
               <a:t>Una pagina del programma completo, esattamente com'è nel repository. Leggetelo dall'inizio: l'intestazione dice che cosa mostra il programma e come compilarlo; seguono le tre funzioni init, update e draw, poi i dati. Le righe incontrate nei listati della lezione hanno qui gli stessi commenti.
+DA UTILIZZARE OGGI: il programma completo (si usa, non si studia, in questo corso).
 Per il docente: code/l19.S, come viene compilato ed eseguito dai test. I commenti fanno parte del programma, e sono in inglese come in tutti i listati: leggeteli con il codice.</a:t>
             </a:r>
             <a:endParaRPr lang="en-US" dirty="0"/>
@@ -1114,6 +1120,7 @@
             <a:r>
               <a:rPr lang="en-US" dirty="0"/>
               <a:t>La via più rapida: PRG32-QT sul vostro computer. Quattro passi, ciascuno con il suo comando. PRG32-QT si comporta come una scheda sulla porta 8080, ed è per questo che il comando di caricamento dice esp32c6. Con la modalità debug abilitata potete fermarvi su qualsiasi istruzione e leggere registri e memoria.
+DA UTILIZZARE OGGI: gli strumenti di PRG32 (si usa, non si studia, in questo corso).
 Per il docente: Eseguito dai test: la cartuccia di questa slide è compilata con questo comando ed eseguita sull'esecutore senza interfaccia di PRG32-QT. Senza la toolchain: importate il file .prg32 in PRG32-QT e scegliete Run Cartridge. Tasti: frecce o WASD per il joystick, Z o J per A, X o K per B, Invio per Start, Esc per tornare a Setup.</a:t>
             </a:r>
             <a:endParaRPr lang="en-US" dirty="0"/>
@@ -1203,6 +1210,7 @@
             <a:r>
               <a:rPr lang="en-US" dirty="0"/>
               <a:t>Lo stesso programma sull'emulatore. QEMU esegue il firmware vero su un chip emulato, quindi la cartuccia va compilata per l'architettura qemu. Caricate la cartuccia mentre QEMU è chiuso. Il firmware si apre sul menu Setup: scegliete Run Cartridge e lo slot. Ricordate che la tastiera è letta dal terminale, non dalla finestra con l'immagine.
+DA UTILIZZARE OGGI: gli strumenti di PRG32 (si usa, non si studia, in questo corso).
 Per il docente: Verificato dai test fino al caricamento: la cartuccia è compilata per l'architettura qemu e accettata nell'immagine flash dell'emulatore. Ciò che l'emulatore poi mostra non è verificato automaticamente: il QEMU di Espressif ha bisogno della sua finestra. Dall'ottobre 2026 il firmware parte da Setup: scegliete Run Cartridge, poi cart0.</a:t>
             </a:r>
             <a:endParaRPr lang="en-US" dirty="0"/>
@@ -1292,6 +1300,7 @@
             <a:r>
               <a:rPr lang="en-US" dirty="0"/>
               <a:t>Lo stesso programma sul kit. Il firmware si scrive una volta, via USB; dopo, le cartucce viaggiano sul Wi-Fi. Il comando di caricamento è quello usato per PRG32-QT con l'indirizzo della scheda. È l'unico host che i test automatici non eseguono: provatelo, e riferite ciò che vedete.
+DA UTILIZZARE OGGI: gli strumenti di PRG32 (si usa, non si studia, in questo corso).
 Per il docente: Non eseguito dai test: sulla macchina di prova non c'è una scheda. La cartuccia per l'architettura esp32c6 è compilata dai test; i passi sono quelli della documentazione di PRG32. Se la porta seriale non viene trovata, passatela esplicitamente. Per usare il Wi-Fi dell'aula: python3 -m prg32 wifi set --ssid NOME --password PASSWORD --mode sta.</a:t>
             </a:r>
             <a:endParaRPr lang="en-US" dirty="0"/>
@@ -1381,6 +1390,7 @@
             <a:r>
               <a:rPr lang="en-US" dirty="0"/>
               <a:t>I cinque sintomi più comuni, che cosa significa ciascuno, e che cosa fare. Leggete il messaggio prima di cambiare qualcosa: quasi sempre nomina la causa.
+DA UTILIZZARE OGGI: gli strumenti di PRG32 (si usa, non si studia, in questo corso).
 Per il docente: Le prime tre righe coprono la maggior parte dei casi. Quando chiedete aiuto, incollate il comando e l'intero messaggio come testo. docs/usage/troubleshooting.md del repository di PRG32 ha l'elenco completo.</a:t>
             </a:r>
             <a:endParaRPr lang="en-US" dirty="0"/>
@@ -1648,6 +1658,7 @@
             <a:r>
               <a:rPr lang="en-US" dirty="0"/>
               <a:t>Quattro parole di memoria, a quattro indirizzi di distanza: è first_update, la funzione che incrementa un contatore. A sinistra gli indirizzi, al centro il codice macchina, a destra ciò che avete scritto. Il processore ha soltanto la colonna centrale. Tre domande organizzano la lezione. Come fa a sapere che la prima parola è un caricamento e la seconda una somma? Quali passi compie per ciascuna? E mentre le esegue, come si accorge che è stato premuto un pulsante o che è scaduto un timer?
+DA COMPRENDERE OGGI: formati delle istruzioni.
 Per il docente: La la che precede queste istruzioni è omessa, e le codifiche sono quelle non compresse a 32 bit: con l'estensione C l'assemblatore può scegliere per alcune le forme a 16 bit. Gli indirizzi sono relativi all'inizio della funzione.</a:t>
             </a:r>
             <a:endParaRPr lang="en-US" dirty="0"/>
@@ -1737,6 +1748,7 @@
             <a:r>
               <a:rPr lang="en-US" dirty="0"/>
               <a:t>Due istruzioni decodificate a mano. Si scrivono in binario le otto cifre esadecimali; si staccano gli ultimi sette bit, l'opcode, che dice il formato; poi si tagliano i campi rimanenti. Per 0x006283B3 l'opcode dice da registro a registro, i campi danno x7, x5 e x6, e funct3 con funct7 dicono somma: add t2, t0, t1. Per 0x0002A303 l'opcode dice load, l'immediato è 0, la base è x5, la destinazione x6: lw t1, 0(t0). Fatelo una volta con carta e matita.
+DA COMPRENDERE OGGI: formati delle istruzioni.
 Per il docente: Metodo: scrivere in binario le otto cifre esadecimali, staccare gli ultimi sette bit (l'opcode), cercare il formato, poi tagliare i campi. I decodificatori della Lezione 11 fanno la stessa cosa in una frazione di nanosecondo.</a:t>
             </a:r>
             <a:endParaRPr lang="en-US" dirty="0"/>
@@ -1826,6 +1838,7 @@
             <a:r>
               <a:rPr lang="en-US" dirty="0"/>
               <a:t>La fase di prelievo in quattro trasferimenti tra registri, con i registri del modello della Lezione 18. Il contenuto del PC va in MA, il registro degli indirizzi di memoria. La memoria viene letta e la parola arriva in MB, il buffer. La parola viene copiata in D, il registro di decodifica. Il PC viene incrementato di 4, perché un'istruzione occupa quattro byte, così punta alla successiva. Ogni riga è un trasferimento sul bus interno, comandato dall'unità di controllo.
+DA COMPRENDERE OGGI: il ciclo del processore.
 Per il docente: Fase fetch. PC, D, MA e MB sono i registri del modello di riferimento della Lezione 18; i trasferimenti viaggiano sul bus interno. Nella presentazione originale la macchina aveva parole di 16 bit e il PC avanzava di 2; in RV32 una parola è di quattro byte, quindi il PC avanza di 4 (di 2 dopo un'istruzione compressa).</a:t>
             </a:r>
             <a:endParaRPr lang="en-US" dirty="0"/>
@@ -1915,6 +1928,7 @@
             <a:r>
               <a:rPr lang="en-US" dirty="0"/>
               <a:t>Le altre quattro fasi, affiancate per due istruzioni. Per add, la decodifica legge i due registri nei registri operando della ALU, l'esecuzione li somma, la fase di memoria viene saltata, e la somma viene scritta in t2. Per lw, il secondo operando è l'immediato, la somma è un indirizzo, la fase di memoria legge la parola a quell'indirizzo, e la parola letta viene scritta in t1. Lo stesso sommatore serve a entrambe: cambiano solo i comandi dell'unità di controllo.
+DA COMPRENDERE OGGI: il ciclo del processore.
 Per il docente: O1, O2 e U sono i registri della ALU. Lo stesso sommatore calcola una somma per add e un indirizzo per lw: cambiano solo i segnali di controllo. Uno store finisce alla fase di memoria; un salto condizionato finisce all'esecuzione, scegliendo il prossimo PC.</a:t>
             </a:r>
             <a:endParaRPr lang="en-US" dirty="0"/>
@@ -2004,6 +2018,7 @@
             <a:r>
               <a:rPr lang="en-US" dirty="0"/>
               <a:t>Un gestore per sommi capi. Fa spazio sullo stack e salva i registri che sta per usare: la parte software del contesto. Legge mcause con csrr e ne esamina il segno: il bit più alto è il bit di segno, quindi bgez separa le eccezioni dalle interruzioni con una sola istruzione. Dopo aver servito l'evento ripristina i registri, rilascia lo stack ed esegue mret. Il programma interrotto non deve accorgersi di nulla: un registro lasciato sporco qui è un errore che compare a caso, ovunque.
+DA COMPRENDERE OGGI: interruzioni e trap.
 Per il docente: Uno schema, non il sorgente di PRG32: un gestore vero salva tutti i registri caller-saved, di solito su uno stack separato raggiunto tramite mscratch. csrr t0, mcause è la pseudo-istruzione per csrrs t0, mcause, zero.</a:t>
             </a:r>
             <a:endParaRPr lang="en-US" dirty="0"/>
@@ -2093,6 +2108,7 @@
             <a:r>
               <a:rPr lang="en-US" dirty="0"/>
               <a:t>Una pagina del programma completo, esattamente com'è nel repository. Leggetelo dall'inizio: l'intestazione dice che cosa mostra il programma e come compilarlo; seguono le tre funzioni init, update e draw, poi i dati. Le righe incontrate nei listati della lezione hanno qui gli stessi commenti.
+DA UTILIZZARE OGGI: il programma completo (si usa, non si studia, in questo corso).
 Per il docente: code/l19.S, come viene compilato ed eseguito dai test. I commenti fanno parte del programma, e sono in inglese come in tutti i listati: leggeteli con il codice.</a:t>
             </a:r>
             <a:endParaRPr lang="en-US" dirty="0"/>
@@ -2182,6 +2198,7 @@
             <a:r>
               <a:rPr lang="en-US" dirty="0"/>
               <a:t>Una pagina del programma completo, esattamente com'è nel repository. Leggetelo dall'inizio: l'intestazione dice che cosa mostra il programma e come compilarlo; seguono le tre funzioni init, update e draw, poi i dati. Le righe incontrate nei listati della lezione hanno qui gli stessi commenti.
+DA UTILIZZARE OGGI: il programma completo (si usa, non si studia, in questo corso).
 Per il docente: code/l19.S, come viene compilato ed eseguito dai test. I commenti fanno parte del programma, e sono in inglese come in tutti i listati: leggeteli con il codice.</a:t>
             </a:r>
             <a:endParaRPr lang="en-US" dirty="0"/>
@@ -3263,6 +3280,420 @@
       </p:pic>
       <p:sp>
         <p:nvSpPr>
+          <p:cNvPr id="14" name="Shape 11"/>
+          <p:cNvSpPr/>
+          <p:nvPr/>
+        </p:nvSpPr>
+        <p:spPr>
+          <a:xfrm>
+            <a:off x="8910777" y="91440"/>
+            <a:ext cx="2732278" cy="274320"/>
+          </a:xfrm>
+          <a:prstGeom prst="rect">
+            <a:avLst/>
+          </a:prstGeom>
+          <a:solidFill>
+            <a:srgbClr val="F3E8FF"/>
+          </a:solidFill>
+          <a:ln w="12700">
+            <a:solidFill>
+              <a:srgbClr val="7E22CE"/>
+            </a:solidFill>
+            <a:prstDash val="dash"/>
+          </a:ln>
+        </p:spPr>
+      </p:sp>
+      <p:sp>
+        <p:nvSpPr>
+          <p:cNvPr id="15" name="Shape 12"/>
+          <p:cNvSpPr/>
+          <p:nvPr/>
+        </p:nvSpPr>
+        <p:spPr>
+          <a:xfrm>
+            <a:off x="8938209" y="128016"/>
+            <a:ext cx="45720" cy="45720"/>
+          </a:xfrm>
+          <a:prstGeom prst="rect">
+            <a:avLst/>
+          </a:prstGeom>
+          <a:solidFill>
+            <a:srgbClr val="7E22CE"/>
+          </a:solidFill>
+          <a:ln w="12700">
+            <a:solidFill>
+              <a:srgbClr val="7E22CE"/>
+            </a:solidFill>
+            <a:prstDash val="solid"/>
+          </a:ln>
+        </p:spPr>
+      </p:sp>
+      <p:sp>
+        <p:nvSpPr>
+          <p:cNvPr id="16" name="Shape 13"/>
+          <p:cNvSpPr/>
+          <p:nvPr/>
+        </p:nvSpPr>
+        <p:spPr>
+          <a:xfrm>
+            <a:off x="8938209" y="205740"/>
+            <a:ext cx="45720" cy="45720"/>
+          </a:xfrm>
+          <a:prstGeom prst="rect">
+            <a:avLst/>
+          </a:prstGeom>
+          <a:solidFill>
+            <a:srgbClr val="7E22CE"/>
+          </a:solidFill>
+          <a:ln w="12700">
+            <a:solidFill>
+              <a:srgbClr val="7E22CE"/>
+            </a:solidFill>
+            <a:prstDash val="solid"/>
+          </a:ln>
+        </p:spPr>
+      </p:sp>
+      <p:sp>
+        <p:nvSpPr>
+          <p:cNvPr id="17" name="Shape 14"/>
+          <p:cNvSpPr/>
+          <p:nvPr/>
+        </p:nvSpPr>
+        <p:spPr>
+          <a:xfrm>
+            <a:off x="8938209" y="283464"/>
+            <a:ext cx="45720" cy="45720"/>
+          </a:xfrm>
+          <a:prstGeom prst="rect">
+            <a:avLst/>
+          </a:prstGeom>
+          <a:solidFill>
+            <a:srgbClr val="7E22CE"/>
+          </a:solidFill>
+          <a:ln w="12700">
+            <a:solidFill>
+              <a:srgbClr val="7E22CE"/>
+            </a:solidFill>
+            <a:prstDash val="solid"/>
+          </a:ln>
+        </p:spPr>
+      </p:sp>
+      <p:pic>
+        <p:nvPicPr>
+          <p:cNvPr id="18" name="Image 1" descr="preencoded.png">    </p:cNvPr>
+          <p:cNvPicPr>
+            <a:picLocks noChangeAspect="1"/>
+          </p:cNvPicPr>
+          <p:nvPr/>
+        </p:nvPicPr>
+        <p:blipFill>
+          <a:blip r:embed="rId2"/>
+          <a:stretch>
+            <a:fillRect/>
+          </a:stretch>
+        </p:blipFill>
+        <p:spPr>
+          <a:xfrm>
+            <a:off x="9038793" y="128016"/>
+            <a:ext cx="201168" cy="201168"/>
+          </a:xfrm>
+          <a:prstGeom prst="rect">
+            <a:avLst/>
+          </a:prstGeom>
+        </p:spPr>
+      </p:pic>
+      <p:sp>
+        <p:nvSpPr>
+          <p:cNvPr id="19" name="Text 15"/>
+          <p:cNvSpPr txBox="1"/>
+          <p:nvPr/>
+        </p:nvSpPr>
+        <p:spPr>
+          <a:xfrm>
+            <a:off x="9294825" y="91440"/>
+            <a:ext cx="2311654" cy="274320"/>
+          </a:xfrm>
+          <a:prstGeom prst="rect">
+            <a:avLst/>
+          </a:prstGeom>
+          <a:noFill/>
+          <a:ln/>
+        </p:spPr>
+        <p:txBody>
+          <a:bodyPr wrap="square" lIns="0" tIns="0" rIns="0" bIns="0" rtlCol="0" anchor="ctr"/>
+          <a:lstStyle/>
+          <a:p>
+            <a:pPr indent="0" marL="0">
+              <a:buNone/>
+            </a:pPr>
+            <a:r>
+              <a:rPr lang="en-US" sz="1100" b="1" dirty="0">
+                <a:solidFill>
+                  <a:srgbClr val="6B21A8"/>
+                </a:solidFill>
+                <a:latin typeface="Calibri" pitchFamily="34" charset="0"/>
+                <a:ea typeface="Calibri" pitchFamily="34" charset="-122"/>
+                <a:cs typeface="Calibri" pitchFamily="34" charset="-120"/>
+              </a:rPr>
+              <a:t>DA COMPRENDERE PIÙ AVANTI</a:t>
+            </a:r>
+            <a:endParaRPr lang="en-US" sz="1100" dirty="0"/>
+          </a:p>
+        </p:txBody>
+      </p:sp>
+      <p:sp>
+        <p:nvSpPr>
+          <p:cNvPr id="20" name="Shape 16"/>
+          <p:cNvSpPr/>
+          <p:nvPr/>
+        </p:nvSpPr>
+        <p:spPr>
+          <a:xfrm>
+            <a:off x="6675069" y="91440"/>
+            <a:ext cx="2125980" cy="274320"/>
+          </a:xfrm>
+          <a:prstGeom prst="rect">
+            <a:avLst/>
+          </a:prstGeom>
+          <a:solidFill>
+            <a:srgbClr val="FEF3C7"/>
+          </a:solidFill>
+          <a:ln w="12700">
+            <a:solidFill>
+              <a:srgbClr val="B45309"/>
+            </a:solidFill>
+            <a:prstDash val="solid"/>
+          </a:ln>
+        </p:spPr>
+      </p:sp>
+      <p:sp>
+        <p:nvSpPr>
+          <p:cNvPr id="21" name="Shape 17"/>
+          <p:cNvSpPr/>
+          <p:nvPr/>
+        </p:nvSpPr>
+        <p:spPr>
+          <a:xfrm>
+            <a:off x="6675069" y="91440"/>
+            <a:ext cx="27432" cy="274320"/>
+          </a:xfrm>
+          <a:prstGeom prst="rect">
+            <a:avLst/>
+          </a:prstGeom>
+          <a:solidFill>
+            <a:srgbClr val="B45309"/>
+          </a:solidFill>
+          <a:ln w="12700">
+            <a:solidFill>
+              <a:srgbClr val="B45309"/>
+            </a:solidFill>
+            <a:prstDash val="solid"/>
+          </a:ln>
+        </p:spPr>
+      </p:sp>
+      <p:sp>
+        <p:nvSpPr>
+          <p:cNvPr id="22" name="Shape 18"/>
+          <p:cNvSpPr/>
+          <p:nvPr/>
+        </p:nvSpPr>
+        <p:spPr>
+          <a:xfrm>
+            <a:off x="6729933" y="91440"/>
+            <a:ext cx="27432" cy="274320"/>
+          </a:xfrm>
+          <a:prstGeom prst="rect">
+            <a:avLst/>
+          </a:prstGeom>
+          <a:solidFill>
+            <a:srgbClr val="B45309"/>
+          </a:solidFill>
+          <a:ln w="12700">
+            <a:solidFill>
+              <a:srgbClr val="B45309"/>
+            </a:solidFill>
+            <a:prstDash val="solid"/>
+          </a:ln>
+        </p:spPr>
+      </p:sp>
+      <p:pic>
+        <p:nvPicPr>
+          <p:cNvPr id="23" name="Image 2" descr="preencoded.png">    </p:cNvPr>
+          <p:cNvPicPr>
+            <a:picLocks noChangeAspect="1"/>
+          </p:cNvPicPr>
+          <p:nvPr/>
+        </p:nvPicPr>
+        <p:blipFill>
+          <a:blip r:embed="rId3"/>
+          <a:stretch>
+            <a:fillRect/>
+          </a:stretch>
+        </p:blipFill>
+        <p:spPr>
+          <a:xfrm>
+            <a:off x="6803085" y="128016"/>
+            <a:ext cx="201168" cy="201168"/>
+          </a:xfrm>
+          <a:prstGeom prst="rect">
+            <a:avLst/>
+          </a:prstGeom>
+        </p:spPr>
+      </p:pic>
+      <p:sp>
+        <p:nvSpPr>
+          <p:cNvPr id="24" name="Text 19"/>
+          <p:cNvSpPr txBox="1"/>
+          <p:nvPr/>
+        </p:nvSpPr>
+        <p:spPr>
+          <a:xfrm>
+            <a:off x="7059117" y="91440"/>
+            <a:ext cx="1705356" cy="274320"/>
+          </a:xfrm>
+          <a:prstGeom prst="rect">
+            <a:avLst/>
+          </a:prstGeom>
+          <a:noFill/>
+          <a:ln/>
+        </p:spPr>
+        <p:txBody>
+          <a:bodyPr wrap="square" lIns="0" tIns="0" rIns="0" bIns="0" rtlCol="0" anchor="ctr"/>
+          <a:lstStyle/>
+          <a:p>
+            <a:pPr indent="0" marL="0">
+              <a:buNone/>
+            </a:pPr>
+            <a:r>
+              <a:rPr lang="en-US" sz="1100" b="1" dirty="0">
+                <a:solidFill>
+                  <a:srgbClr val="92400E"/>
+                </a:solidFill>
+                <a:latin typeface="Calibri" pitchFamily="34" charset="0"/>
+                <a:ea typeface="Calibri" pitchFamily="34" charset="-122"/>
+                <a:cs typeface="Calibri" pitchFamily="34" charset="-120"/>
+              </a:rPr>
+              <a:t>DA UTILIZZARE OGGI</a:t>
+            </a:r>
+            <a:endParaRPr lang="en-US" sz="1100" dirty="0"/>
+          </a:p>
+        </p:txBody>
+      </p:sp>
+      <p:sp>
+        <p:nvSpPr>
+          <p:cNvPr id="25" name="Shape 20"/>
+          <p:cNvSpPr/>
+          <p:nvPr/>
+        </p:nvSpPr>
+        <p:spPr>
+          <a:xfrm>
+            <a:off x="4352747" y="91440"/>
+            <a:ext cx="2212594" cy="274320"/>
+          </a:xfrm>
+          <a:prstGeom prst="rect">
+            <a:avLst/>
+          </a:prstGeom>
+          <a:solidFill>
+            <a:srgbClr val="E0F2FE"/>
+          </a:solidFill>
+          <a:ln w="12700">
+            <a:solidFill>
+              <a:srgbClr val="0369A1"/>
+            </a:solidFill>
+            <a:prstDash val="solid"/>
+          </a:ln>
+        </p:spPr>
+      </p:sp>
+      <p:sp>
+        <p:nvSpPr>
+          <p:cNvPr id="26" name="Shape 21"/>
+          <p:cNvSpPr/>
+          <p:nvPr/>
+        </p:nvSpPr>
+        <p:spPr>
+          <a:xfrm>
+            <a:off x="4352747" y="91440"/>
+            <a:ext cx="73152" cy="274320"/>
+          </a:xfrm>
+          <a:prstGeom prst="rect">
+            <a:avLst/>
+          </a:prstGeom>
+          <a:solidFill>
+            <a:srgbClr val="0369A1"/>
+          </a:solidFill>
+          <a:ln w="12700">
+            <a:solidFill>
+              <a:srgbClr val="0369A1"/>
+            </a:solidFill>
+            <a:prstDash val="solid"/>
+          </a:ln>
+        </p:spPr>
+      </p:sp>
+      <p:pic>
+        <p:nvPicPr>
+          <p:cNvPr id="27" name="Image 3" descr="preencoded.png">    </p:cNvPr>
+          <p:cNvPicPr>
+            <a:picLocks noChangeAspect="1"/>
+          </p:cNvPicPr>
+          <p:nvPr/>
+        </p:nvPicPr>
+        <p:blipFill>
+          <a:blip r:embed="rId4"/>
+          <a:stretch>
+            <a:fillRect/>
+          </a:stretch>
+        </p:blipFill>
+        <p:spPr>
+          <a:xfrm>
+            <a:off x="4480763" y="128016"/>
+            <a:ext cx="201168" cy="201168"/>
+          </a:xfrm>
+          <a:prstGeom prst="rect">
+            <a:avLst/>
+          </a:prstGeom>
+        </p:spPr>
+      </p:pic>
+      <p:sp>
+        <p:nvSpPr>
+          <p:cNvPr id="28" name="Text 22"/>
+          <p:cNvSpPr txBox="1"/>
+          <p:nvPr/>
+        </p:nvSpPr>
+        <p:spPr>
+          <a:xfrm>
+            <a:off x="4736795" y="91440"/>
+            <a:ext cx="1791970" cy="274320"/>
+          </a:xfrm>
+          <a:prstGeom prst="rect">
+            <a:avLst/>
+          </a:prstGeom>
+          <a:noFill/>
+          <a:ln/>
+        </p:spPr>
+        <p:txBody>
+          <a:bodyPr wrap="square" lIns="0" tIns="0" rIns="0" bIns="0" rtlCol="0" anchor="ctr"/>
+          <a:lstStyle/>
+          <a:p>
+            <a:pPr indent="0" marL="0">
+              <a:buNone/>
+            </a:pPr>
+            <a:r>
+              <a:rPr lang="en-US" sz="1100" b="1" dirty="0">
+                <a:solidFill>
+                  <a:srgbClr val="075985"/>
+                </a:solidFill>
+                <a:latin typeface="Calibri" pitchFamily="34" charset="0"/>
+                <a:ea typeface="Calibri" pitchFamily="34" charset="-122"/>
+                <a:cs typeface="Calibri" pitchFamily="34" charset="-120"/>
+              </a:rPr>
+              <a:t>DA COMPRENDERE OGGI</a:t>
+            </a:r>
+            <a:endParaRPr lang="en-US" sz="1100" dirty="0"/>
+          </a:p>
+        </p:txBody>
+      </p:sp>
+      <p:sp>
+        <p:nvSpPr>
           <p:cNvPr id="25" name="Slide Number Placeholder 0"/>
           <p:cNvSpPr>
             <a:spLocks noGrp="1"/>
@@ -3904,6 +4335,158 @@
       </p:sp>
       <p:sp>
         <p:nvSpPr>
+          <p:cNvPr id="5" name="Shape 3"/>
+          <p:cNvSpPr/>
+          <p:nvPr/>
+        </p:nvSpPr>
+        <p:spPr>
+          <a:xfrm>
+            <a:off x="7941259" y="91440"/>
+            <a:ext cx="3701796" cy="274320"/>
+          </a:xfrm>
+          <a:prstGeom prst="rect">
+            <a:avLst/>
+          </a:prstGeom>
+          <a:solidFill>
+            <a:srgbClr val="FEF3C7"/>
+          </a:solidFill>
+          <a:ln w="12700">
+            <a:solidFill>
+              <a:srgbClr val="B45309"/>
+            </a:solidFill>
+            <a:prstDash val="solid"/>
+          </a:ln>
+        </p:spPr>
+      </p:sp>
+      <p:sp>
+        <p:nvSpPr>
+          <p:cNvPr id="6" name="Shape 4"/>
+          <p:cNvSpPr/>
+          <p:nvPr/>
+        </p:nvSpPr>
+        <p:spPr>
+          <a:xfrm>
+            <a:off x="7941259" y="91440"/>
+            <a:ext cx="27432" cy="274320"/>
+          </a:xfrm>
+          <a:prstGeom prst="rect">
+            <a:avLst/>
+          </a:prstGeom>
+          <a:solidFill>
+            <a:srgbClr val="B45309"/>
+          </a:solidFill>
+          <a:ln w="12700">
+            <a:solidFill>
+              <a:srgbClr val="B45309"/>
+            </a:solidFill>
+            <a:prstDash val="solid"/>
+          </a:ln>
+        </p:spPr>
+      </p:sp>
+      <p:sp>
+        <p:nvSpPr>
+          <p:cNvPr id="7" name="Shape 5"/>
+          <p:cNvSpPr/>
+          <p:nvPr/>
+        </p:nvSpPr>
+        <p:spPr>
+          <a:xfrm>
+            <a:off x="7996123" y="91440"/>
+            <a:ext cx="27432" cy="274320"/>
+          </a:xfrm>
+          <a:prstGeom prst="rect">
+            <a:avLst/>
+          </a:prstGeom>
+          <a:solidFill>
+            <a:srgbClr val="B45309"/>
+          </a:solidFill>
+          <a:ln w="12700">
+            <a:solidFill>
+              <a:srgbClr val="B45309"/>
+            </a:solidFill>
+            <a:prstDash val="solid"/>
+          </a:ln>
+        </p:spPr>
+      </p:sp>
+      <p:pic>
+        <p:nvPicPr>
+          <p:cNvPr id="8" name="Image 0" descr="preencoded.png">    </p:cNvPr>
+          <p:cNvPicPr>
+            <a:picLocks noChangeAspect="1"/>
+          </p:cNvPicPr>
+          <p:nvPr/>
+        </p:nvPicPr>
+        <p:blipFill>
+          <a:blip r:embed="rId1"/>
+          <a:stretch>
+            <a:fillRect/>
+          </a:stretch>
+        </p:blipFill>
+        <p:spPr>
+          <a:xfrm>
+            <a:off x="8069275" y="128016"/>
+            <a:ext cx="201168" cy="201168"/>
+          </a:xfrm>
+          <a:prstGeom prst="rect">
+            <a:avLst/>
+          </a:prstGeom>
+        </p:spPr>
+      </p:pic>
+      <p:sp>
+        <p:nvSpPr>
+          <p:cNvPr id="9" name="Text 6"/>
+          <p:cNvSpPr txBox="1"/>
+          <p:nvPr/>
+        </p:nvSpPr>
+        <p:spPr>
+          <a:xfrm>
+            <a:off x="8325307" y="91440"/>
+            <a:ext cx="3281172" cy="274320"/>
+          </a:xfrm>
+          <a:prstGeom prst="rect">
+            <a:avLst/>
+          </a:prstGeom>
+          <a:noFill/>
+          <a:ln/>
+        </p:spPr>
+        <p:txBody>
+          <a:bodyPr wrap="square" lIns="0" tIns="0" rIns="0" bIns="0" rtlCol="0" anchor="ctr"/>
+          <a:lstStyle/>
+          <a:p>
+            <a:pPr indent="0" marL="0">
+              <a:buNone/>
+            </a:pPr>
+            <a:r>
+              <a:rPr lang="en-US" sz="1100" b="1" dirty="0">
+                <a:solidFill>
+                  <a:srgbClr val="92400E"/>
+                </a:solidFill>
+                <a:latin typeface="Calibri" pitchFamily="34" charset="0"/>
+                <a:ea typeface="Calibri" pitchFamily="34" charset="-122"/>
+                <a:cs typeface="Calibri" pitchFamily="34" charset="-120"/>
+              </a:rPr>
+              <a:t>DA UTILIZZARE OGGI</a:t>
+            </a:r>
+            <a:pPr indent="0" marL="0">
+              <a:buNone/>
+            </a:pPr>
+            <a:r>
+              <a:rPr lang="en-US" sz="1100" dirty="0">
+                <a:solidFill>
+                  <a:srgbClr val="92400E"/>
+                </a:solidFill>
+                <a:latin typeface="Calibri" pitchFamily="34" charset="0"/>
+                <a:ea typeface="Calibri" pitchFamily="34" charset="-122"/>
+                <a:cs typeface="Calibri" pitchFamily="34" charset="-120"/>
+              </a:rPr>
+              <a:t> · il programma completo</a:t>
+            </a:r>
+            <a:endParaRPr lang="en-US" sz="1100" dirty="0"/>
+          </a:p>
+        </p:txBody>
+      </p:sp>
+      <p:sp>
+        <p:nvSpPr>
           <p:cNvPr id="25" name="Slide Number Placeholder 0"/>
           <p:cNvSpPr>
             <a:spLocks noGrp="1"/>
@@ -4288,6 +4871,158 @@
       </p:sp>
       <p:sp>
         <p:nvSpPr>
+          <p:cNvPr id="5" name="Shape 3"/>
+          <p:cNvSpPr/>
+          <p:nvPr/>
+        </p:nvSpPr>
+        <p:spPr>
+          <a:xfrm>
+            <a:off x="7941259" y="91440"/>
+            <a:ext cx="3701796" cy="274320"/>
+          </a:xfrm>
+          <a:prstGeom prst="rect">
+            <a:avLst/>
+          </a:prstGeom>
+          <a:solidFill>
+            <a:srgbClr val="FEF3C7"/>
+          </a:solidFill>
+          <a:ln w="12700">
+            <a:solidFill>
+              <a:srgbClr val="B45309"/>
+            </a:solidFill>
+            <a:prstDash val="solid"/>
+          </a:ln>
+        </p:spPr>
+      </p:sp>
+      <p:sp>
+        <p:nvSpPr>
+          <p:cNvPr id="6" name="Shape 4"/>
+          <p:cNvSpPr/>
+          <p:nvPr/>
+        </p:nvSpPr>
+        <p:spPr>
+          <a:xfrm>
+            <a:off x="7941259" y="91440"/>
+            <a:ext cx="27432" cy="274320"/>
+          </a:xfrm>
+          <a:prstGeom prst="rect">
+            <a:avLst/>
+          </a:prstGeom>
+          <a:solidFill>
+            <a:srgbClr val="B45309"/>
+          </a:solidFill>
+          <a:ln w="12700">
+            <a:solidFill>
+              <a:srgbClr val="B45309"/>
+            </a:solidFill>
+            <a:prstDash val="solid"/>
+          </a:ln>
+        </p:spPr>
+      </p:sp>
+      <p:sp>
+        <p:nvSpPr>
+          <p:cNvPr id="7" name="Shape 5"/>
+          <p:cNvSpPr/>
+          <p:nvPr/>
+        </p:nvSpPr>
+        <p:spPr>
+          <a:xfrm>
+            <a:off x="7996123" y="91440"/>
+            <a:ext cx="27432" cy="274320"/>
+          </a:xfrm>
+          <a:prstGeom prst="rect">
+            <a:avLst/>
+          </a:prstGeom>
+          <a:solidFill>
+            <a:srgbClr val="B45309"/>
+          </a:solidFill>
+          <a:ln w="12700">
+            <a:solidFill>
+              <a:srgbClr val="B45309"/>
+            </a:solidFill>
+            <a:prstDash val="solid"/>
+          </a:ln>
+        </p:spPr>
+      </p:sp>
+      <p:pic>
+        <p:nvPicPr>
+          <p:cNvPr id="8" name="Image 0" descr="preencoded.png">    </p:cNvPr>
+          <p:cNvPicPr>
+            <a:picLocks noChangeAspect="1"/>
+          </p:cNvPicPr>
+          <p:nvPr/>
+        </p:nvPicPr>
+        <p:blipFill>
+          <a:blip r:embed="rId1"/>
+          <a:stretch>
+            <a:fillRect/>
+          </a:stretch>
+        </p:blipFill>
+        <p:spPr>
+          <a:xfrm>
+            <a:off x="8069275" y="128016"/>
+            <a:ext cx="201168" cy="201168"/>
+          </a:xfrm>
+          <a:prstGeom prst="rect">
+            <a:avLst/>
+          </a:prstGeom>
+        </p:spPr>
+      </p:pic>
+      <p:sp>
+        <p:nvSpPr>
+          <p:cNvPr id="9" name="Text 6"/>
+          <p:cNvSpPr txBox="1"/>
+          <p:nvPr/>
+        </p:nvSpPr>
+        <p:spPr>
+          <a:xfrm>
+            <a:off x="8325307" y="91440"/>
+            <a:ext cx="3281172" cy="274320"/>
+          </a:xfrm>
+          <a:prstGeom prst="rect">
+            <a:avLst/>
+          </a:prstGeom>
+          <a:noFill/>
+          <a:ln/>
+        </p:spPr>
+        <p:txBody>
+          <a:bodyPr wrap="square" lIns="0" tIns="0" rIns="0" bIns="0" rtlCol="0" anchor="ctr"/>
+          <a:lstStyle/>
+          <a:p>
+            <a:pPr indent="0" marL="0">
+              <a:buNone/>
+            </a:pPr>
+            <a:r>
+              <a:rPr lang="en-US" sz="1100" b="1" dirty="0">
+                <a:solidFill>
+                  <a:srgbClr val="92400E"/>
+                </a:solidFill>
+                <a:latin typeface="Calibri" pitchFamily="34" charset="0"/>
+                <a:ea typeface="Calibri" pitchFamily="34" charset="-122"/>
+                <a:cs typeface="Calibri" pitchFamily="34" charset="-120"/>
+              </a:rPr>
+              <a:t>DA UTILIZZARE OGGI</a:t>
+            </a:r>
+            <a:pPr indent="0" marL="0">
+              <a:buNone/>
+            </a:pPr>
+            <a:r>
+              <a:rPr lang="en-US" sz="1100" dirty="0">
+                <a:solidFill>
+                  <a:srgbClr val="92400E"/>
+                </a:solidFill>
+                <a:latin typeface="Calibri" pitchFamily="34" charset="0"/>
+                <a:ea typeface="Calibri" pitchFamily="34" charset="-122"/>
+                <a:cs typeface="Calibri" pitchFamily="34" charset="-120"/>
+              </a:rPr>
+              <a:t> · il programma completo</a:t>
+            </a:r>
+            <a:endParaRPr lang="en-US" sz="1100" dirty="0"/>
+          </a:p>
+        </p:txBody>
+      </p:sp>
+      <p:sp>
+        <p:nvSpPr>
           <p:cNvPr id="25" name="Slide Number Placeholder 0"/>
           <p:cNvSpPr>
             <a:spLocks noGrp="1"/>
@@ -4999,6 +5734,158 @@
       </p:sp>
       <p:sp>
         <p:nvSpPr>
+          <p:cNvPr id="5" name="Shape 3"/>
+          <p:cNvSpPr/>
+          <p:nvPr/>
+        </p:nvSpPr>
+        <p:spPr>
+          <a:xfrm>
+            <a:off x="7941259" y="91440"/>
+            <a:ext cx="3701796" cy="274320"/>
+          </a:xfrm>
+          <a:prstGeom prst="rect">
+            <a:avLst/>
+          </a:prstGeom>
+          <a:solidFill>
+            <a:srgbClr val="FEF3C7"/>
+          </a:solidFill>
+          <a:ln w="12700">
+            <a:solidFill>
+              <a:srgbClr val="B45309"/>
+            </a:solidFill>
+            <a:prstDash val="solid"/>
+          </a:ln>
+        </p:spPr>
+      </p:sp>
+      <p:sp>
+        <p:nvSpPr>
+          <p:cNvPr id="6" name="Shape 4"/>
+          <p:cNvSpPr/>
+          <p:nvPr/>
+        </p:nvSpPr>
+        <p:spPr>
+          <a:xfrm>
+            <a:off x="7941259" y="91440"/>
+            <a:ext cx="27432" cy="274320"/>
+          </a:xfrm>
+          <a:prstGeom prst="rect">
+            <a:avLst/>
+          </a:prstGeom>
+          <a:solidFill>
+            <a:srgbClr val="B45309"/>
+          </a:solidFill>
+          <a:ln w="12700">
+            <a:solidFill>
+              <a:srgbClr val="B45309"/>
+            </a:solidFill>
+            <a:prstDash val="solid"/>
+          </a:ln>
+        </p:spPr>
+      </p:sp>
+      <p:sp>
+        <p:nvSpPr>
+          <p:cNvPr id="7" name="Shape 5"/>
+          <p:cNvSpPr/>
+          <p:nvPr/>
+        </p:nvSpPr>
+        <p:spPr>
+          <a:xfrm>
+            <a:off x="7996123" y="91440"/>
+            <a:ext cx="27432" cy="274320"/>
+          </a:xfrm>
+          <a:prstGeom prst="rect">
+            <a:avLst/>
+          </a:prstGeom>
+          <a:solidFill>
+            <a:srgbClr val="B45309"/>
+          </a:solidFill>
+          <a:ln w="12700">
+            <a:solidFill>
+              <a:srgbClr val="B45309"/>
+            </a:solidFill>
+            <a:prstDash val="solid"/>
+          </a:ln>
+        </p:spPr>
+      </p:sp>
+      <p:pic>
+        <p:nvPicPr>
+          <p:cNvPr id="8" name="Image 0" descr="preencoded.png">    </p:cNvPr>
+          <p:cNvPicPr>
+            <a:picLocks noChangeAspect="1"/>
+          </p:cNvPicPr>
+          <p:nvPr/>
+        </p:nvPicPr>
+        <p:blipFill>
+          <a:blip r:embed="rId1"/>
+          <a:stretch>
+            <a:fillRect/>
+          </a:stretch>
+        </p:blipFill>
+        <p:spPr>
+          <a:xfrm>
+            <a:off x="8069275" y="128016"/>
+            <a:ext cx="201168" cy="201168"/>
+          </a:xfrm>
+          <a:prstGeom prst="rect">
+            <a:avLst/>
+          </a:prstGeom>
+        </p:spPr>
+      </p:pic>
+      <p:sp>
+        <p:nvSpPr>
+          <p:cNvPr id="9" name="Text 6"/>
+          <p:cNvSpPr txBox="1"/>
+          <p:nvPr/>
+        </p:nvSpPr>
+        <p:spPr>
+          <a:xfrm>
+            <a:off x="8325307" y="91440"/>
+            <a:ext cx="3281172" cy="274320"/>
+          </a:xfrm>
+          <a:prstGeom prst="rect">
+            <a:avLst/>
+          </a:prstGeom>
+          <a:noFill/>
+          <a:ln/>
+        </p:spPr>
+        <p:txBody>
+          <a:bodyPr wrap="square" lIns="0" tIns="0" rIns="0" bIns="0" rtlCol="0" anchor="ctr"/>
+          <a:lstStyle/>
+          <a:p>
+            <a:pPr indent="0" marL="0">
+              <a:buNone/>
+            </a:pPr>
+            <a:r>
+              <a:rPr lang="en-US" sz="1100" b="1" dirty="0">
+                <a:solidFill>
+                  <a:srgbClr val="92400E"/>
+                </a:solidFill>
+                <a:latin typeface="Calibri" pitchFamily="34" charset="0"/>
+                <a:ea typeface="Calibri" pitchFamily="34" charset="-122"/>
+                <a:cs typeface="Calibri" pitchFamily="34" charset="-120"/>
+              </a:rPr>
+              <a:t>DA UTILIZZARE OGGI</a:t>
+            </a:r>
+            <a:pPr indent="0" marL="0">
+              <a:buNone/>
+            </a:pPr>
+            <a:r>
+              <a:rPr lang="en-US" sz="1100" dirty="0">
+                <a:solidFill>
+                  <a:srgbClr val="92400E"/>
+                </a:solidFill>
+                <a:latin typeface="Calibri" pitchFamily="34" charset="0"/>
+                <a:ea typeface="Calibri" pitchFamily="34" charset="-122"/>
+                <a:cs typeface="Calibri" pitchFamily="34" charset="-120"/>
+              </a:rPr>
+              <a:t> · il programma completo</a:t>
+            </a:r>
+            <a:endParaRPr lang="en-US" sz="1100" dirty="0"/>
+          </a:p>
+        </p:txBody>
+      </p:sp>
+      <p:sp>
+        <p:nvSpPr>
           <p:cNvPr id="25" name="Slide Number Placeholder 0"/>
           <p:cNvSpPr>
             <a:spLocks noGrp="1"/>
@@ -5383,6 +6270,158 @@
       </p:sp>
       <p:sp>
         <p:nvSpPr>
+          <p:cNvPr id="5" name="Shape 3"/>
+          <p:cNvSpPr/>
+          <p:nvPr/>
+        </p:nvSpPr>
+        <p:spPr>
+          <a:xfrm>
+            <a:off x="7941259" y="91440"/>
+            <a:ext cx="3701796" cy="274320"/>
+          </a:xfrm>
+          <a:prstGeom prst="rect">
+            <a:avLst/>
+          </a:prstGeom>
+          <a:solidFill>
+            <a:srgbClr val="FEF3C7"/>
+          </a:solidFill>
+          <a:ln w="12700">
+            <a:solidFill>
+              <a:srgbClr val="B45309"/>
+            </a:solidFill>
+            <a:prstDash val="solid"/>
+          </a:ln>
+        </p:spPr>
+      </p:sp>
+      <p:sp>
+        <p:nvSpPr>
+          <p:cNvPr id="6" name="Shape 4"/>
+          <p:cNvSpPr/>
+          <p:nvPr/>
+        </p:nvSpPr>
+        <p:spPr>
+          <a:xfrm>
+            <a:off x="7941259" y="91440"/>
+            <a:ext cx="27432" cy="274320"/>
+          </a:xfrm>
+          <a:prstGeom prst="rect">
+            <a:avLst/>
+          </a:prstGeom>
+          <a:solidFill>
+            <a:srgbClr val="B45309"/>
+          </a:solidFill>
+          <a:ln w="12700">
+            <a:solidFill>
+              <a:srgbClr val="B45309"/>
+            </a:solidFill>
+            <a:prstDash val="solid"/>
+          </a:ln>
+        </p:spPr>
+      </p:sp>
+      <p:sp>
+        <p:nvSpPr>
+          <p:cNvPr id="7" name="Shape 5"/>
+          <p:cNvSpPr/>
+          <p:nvPr/>
+        </p:nvSpPr>
+        <p:spPr>
+          <a:xfrm>
+            <a:off x="7996123" y="91440"/>
+            <a:ext cx="27432" cy="274320"/>
+          </a:xfrm>
+          <a:prstGeom prst="rect">
+            <a:avLst/>
+          </a:prstGeom>
+          <a:solidFill>
+            <a:srgbClr val="B45309"/>
+          </a:solidFill>
+          <a:ln w="12700">
+            <a:solidFill>
+              <a:srgbClr val="B45309"/>
+            </a:solidFill>
+            <a:prstDash val="solid"/>
+          </a:ln>
+        </p:spPr>
+      </p:sp>
+      <p:pic>
+        <p:nvPicPr>
+          <p:cNvPr id="8" name="Image 0" descr="preencoded.png">    </p:cNvPr>
+          <p:cNvPicPr>
+            <a:picLocks noChangeAspect="1"/>
+          </p:cNvPicPr>
+          <p:nvPr/>
+        </p:nvPicPr>
+        <p:blipFill>
+          <a:blip r:embed="rId1"/>
+          <a:stretch>
+            <a:fillRect/>
+          </a:stretch>
+        </p:blipFill>
+        <p:spPr>
+          <a:xfrm>
+            <a:off x="8069275" y="128016"/>
+            <a:ext cx="201168" cy="201168"/>
+          </a:xfrm>
+          <a:prstGeom prst="rect">
+            <a:avLst/>
+          </a:prstGeom>
+        </p:spPr>
+      </p:pic>
+      <p:sp>
+        <p:nvSpPr>
+          <p:cNvPr id="9" name="Text 6"/>
+          <p:cNvSpPr txBox="1"/>
+          <p:nvPr/>
+        </p:nvSpPr>
+        <p:spPr>
+          <a:xfrm>
+            <a:off x="8325307" y="91440"/>
+            <a:ext cx="3281172" cy="274320"/>
+          </a:xfrm>
+          <a:prstGeom prst="rect">
+            <a:avLst/>
+          </a:prstGeom>
+          <a:noFill/>
+          <a:ln/>
+        </p:spPr>
+        <p:txBody>
+          <a:bodyPr wrap="square" lIns="0" tIns="0" rIns="0" bIns="0" rtlCol="0" anchor="ctr"/>
+          <a:lstStyle/>
+          <a:p>
+            <a:pPr indent="0" marL="0">
+              <a:buNone/>
+            </a:pPr>
+            <a:r>
+              <a:rPr lang="en-US" sz="1100" b="1" dirty="0">
+                <a:solidFill>
+                  <a:srgbClr val="92400E"/>
+                </a:solidFill>
+                <a:latin typeface="Calibri" pitchFamily="34" charset="0"/>
+                <a:ea typeface="Calibri" pitchFamily="34" charset="-122"/>
+                <a:cs typeface="Calibri" pitchFamily="34" charset="-120"/>
+              </a:rPr>
+              <a:t>DA UTILIZZARE OGGI</a:t>
+            </a:r>
+            <a:pPr indent="0" marL="0">
+              <a:buNone/>
+            </a:pPr>
+            <a:r>
+              <a:rPr lang="en-US" sz="1100" dirty="0">
+                <a:solidFill>
+                  <a:srgbClr val="92400E"/>
+                </a:solidFill>
+                <a:latin typeface="Calibri" pitchFamily="34" charset="0"/>
+                <a:ea typeface="Calibri" pitchFamily="34" charset="-122"/>
+                <a:cs typeface="Calibri" pitchFamily="34" charset="-120"/>
+              </a:rPr>
+              <a:t> · il programma completo</a:t>
+            </a:r>
+            <a:endParaRPr lang="en-US" sz="1100" dirty="0"/>
+          </a:p>
+        </p:txBody>
+      </p:sp>
+      <p:sp>
+        <p:nvSpPr>
           <p:cNvPr id="25" name="Slide Number Placeholder 0"/>
           <p:cNvSpPr>
             <a:spLocks noGrp="1"/>
@@ -6536,6 +7575,158 @@
       </p:sp>
       <p:sp>
         <p:nvSpPr>
+          <p:cNvPr id="17" name="Shape 15"/>
+          <p:cNvSpPr/>
+          <p:nvPr/>
+        </p:nvSpPr>
+        <p:spPr>
+          <a:xfrm>
+            <a:off x="7875600" y="91440"/>
+            <a:ext cx="3767455" cy="274320"/>
+          </a:xfrm>
+          <a:prstGeom prst="rect">
+            <a:avLst/>
+          </a:prstGeom>
+          <a:solidFill>
+            <a:srgbClr val="FEF3C7"/>
+          </a:solidFill>
+          <a:ln w="12700">
+            <a:solidFill>
+              <a:srgbClr val="B45309"/>
+            </a:solidFill>
+            <a:prstDash val="solid"/>
+          </a:ln>
+        </p:spPr>
+      </p:sp>
+      <p:sp>
+        <p:nvSpPr>
+          <p:cNvPr id="18" name="Shape 16"/>
+          <p:cNvSpPr/>
+          <p:nvPr/>
+        </p:nvSpPr>
+        <p:spPr>
+          <a:xfrm>
+            <a:off x="7875600" y="91440"/>
+            <a:ext cx="27432" cy="274320"/>
+          </a:xfrm>
+          <a:prstGeom prst="rect">
+            <a:avLst/>
+          </a:prstGeom>
+          <a:solidFill>
+            <a:srgbClr val="B45309"/>
+          </a:solidFill>
+          <a:ln w="12700">
+            <a:solidFill>
+              <a:srgbClr val="B45309"/>
+            </a:solidFill>
+            <a:prstDash val="solid"/>
+          </a:ln>
+        </p:spPr>
+      </p:sp>
+      <p:sp>
+        <p:nvSpPr>
+          <p:cNvPr id="19" name="Shape 17"/>
+          <p:cNvSpPr/>
+          <p:nvPr/>
+        </p:nvSpPr>
+        <p:spPr>
+          <a:xfrm>
+            <a:off x="7930464" y="91440"/>
+            <a:ext cx="27432" cy="274320"/>
+          </a:xfrm>
+          <a:prstGeom prst="rect">
+            <a:avLst/>
+          </a:prstGeom>
+          <a:solidFill>
+            <a:srgbClr val="B45309"/>
+          </a:solidFill>
+          <a:ln w="12700">
+            <a:solidFill>
+              <a:srgbClr val="B45309"/>
+            </a:solidFill>
+            <a:prstDash val="solid"/>
+          </a:ln>
+        </p:spPr>
+      </p:sp>
+      <p:pic>
+        <p:nvPicPr>
+          <p:cNvPr id="20" name="Image 0" descr="preencoded.png">    </p:cNvPr>
+          <p:cNvPicPr>
+            <a:picLocks noChangeAspect="1"/>
+          </p:cNvPicPr>
+          <p:nvPr/>
+        </p:nvPicPr>
+        <p:blipFill>
+          <a:blip r:embed="rId1"/>
+          <a:stretch>
+            <a:fillRect/>
+          </a:stretch>
+        </p:blipFill>
+        <p:spPr>
+          <a:xfrm>
+            <a:off x="8003616" y="128016"/>
+            <a:ext cx="201168" cy="201168"/>
+          </a:xfrm>
+          <a:prstGeom prst="rect">
+            <a:avLst/>
+          </a:prstGeom>
+        </p:spPr>
+      </p:pic>
+      <p:sp>
+        <p:nvSpPr>
+          <p:cNvPr id="21" name="Text 18"/>
+          <p:cNvSpPr txBox="1"/>
+          <p:nvPr/>
+        </p:nvSpPr>
+        <p:spPr>
+          <a:xfrm>
+            <a:off x="8259648" y="91440"/>
+            <a:ext cx="3346831" cy="274320"/>
+          </a:xfrm>
+          <a:prstGeom prst="rect">
+            <a:avLst/>
+          </a:prstGeom>
+          <a:noFill/>
+          <a:ln/>
+        </p:spPr>
+        <p:txBody>
+          <a:bodyPr wrap="square" lIns="0" tIns="0" rIns="0" bIns="0" rtlCol="0" anchor="ctr"/>
+          <a:lstStyle/>
+          <a:p>
+            <a:pPr indent="0" marL="0">
+              <a:buNone/>
+            </a:pPr>
+            <a:r>
+              <a:rPr lang="en-US" sz="1100" b="1" dirty="0">
+                <a:solidFill>
+                  <a:srgbClr val="92400E"/>
+                </a:solidFill>
+                <a:latin typeface="Calibri" pitchFamily="34" charset="0"/>
+                <a:ea typeface="Calibri" pitchFamily="34" charset="-122"/>
+                <a:cs typeface="Calibri" pitchFamily="34" charset="-120"/>
+              </a:rPr>
+              <a:t>DA UTILIZZARE OGGI</a:t>
+            </a:r>
+            <a:pPr indent="0" marL="0">
+              <a:buNone/>
+            </a:pPr>
+            <a:r>
+              <a:rPr lang="en-US" sz="1100" dirty="0">
+                <a:solidFill>
+                  <a:srgbClr val="92400E"/>
+                </a:solidFill>
+                <a:latin typeface="Calibri" pitchFamily="34" charset="0"/>
+                <a:ea typeface="Calibri" pitchFamily="34" charset="-122"/>
+                <a:cs typeface="Calibri" pitchFamily="34" charset="-120"/>
+              </a:rPr>
+              <a:t> · gli strumenti di PRG32</a:t>
+            </a:r>
+            <a:endParaRPr lang="en-US" sz="1100" dirty="0"/>
+          </a:p>
+        </p:txBody>
+      </p:sp>
+      <p:sp>
+        <p:nvSpPr>
           <p:cNvPr id="25" name="Slide Number Placeholder 0"/>
           <p:cNvSpPr>
             <a:spLocks noGrp="1"/>
@@ -7372,6 +8563,158 @@
       </p:sp>
       <p:sp>
         <p:nvSpPr>
+          <p:cNvPr id="17" name="Shape 15"/>
+          <p:cNvSpPr/>
+          <p:nvPr/>
+        </p:nvSpPr>
+        <p:spPr>
+          <a:xfrm>
+            <a:off x="7875600" y="91440"/>
+            <a:ext cx="3767455" cy="274320"/>
+          </a:xfrm>
+          <a:prstGeom prst="rect">
+            <a:avLst/>
+          </a:prstGeom>
+          <a:solidFill>
+            <a:srgbClr val="FEF3C7"/>
+          </a:solidFill>
+          <a:ln w="12700">
+            <a:solidFill>
+              <a:srgbClr val="B45309"/>
+            </a:solidFill>
+            <a:prstDash val="solid"/>
+          </a:ln>
+        </p:spPr>
+      </p:sp>
+      <p:sp>
+        <p:nvSpPr>
+          <p:cNvPr id="18" name="Shape 16"/>
+          <p:cNvSpPr/>
+          <p:nvPr/>
+        </p:nvSpPr>
+        <p:spPr>
+          <a:xfrm>
+            <a:off x="7875600" y="91440"/>
+            <a:ext cx="27432" cy="274320"/>
+          </a:xfrm>
+          <a:prstGeom prst="rect">
+            <a:avLst/>
+          </a:prstGeom>
+          <a:solidFill>
+            <a:srgbClr val="B45309"/>
+          </a:solidFill>
+          <a:ln w="12700">
+            <a:solidFill>
+              <a:srgbClr val="B45309"/>
+            </a:solidFill>
+            <a:prstDash val="solid"/>
+          </a:ln>
+        </p:spPr>
+      </p:sp>
+      <p:sp>
+        <p:nvSpPr>
+          <p:cNvPr id="19" name="Shape 17"/>
+          <p:cNvSpPr/>
+          <p:nvPr/>
+        </p:nvSpPr>
+        <p:spPr>
+          <a:xfrm>
+            <a:off x="7930464" y="91440"/>
+            <a:ext cx="27432" cy="274320"/>
+          </a:xfrm>
+          <a:prstGeom prst="rect">
+            <a:avLst/>
+          </a:prstGeom>
+          <a:solidFill>
+            <a:srgbClr val="B45309"/>
+          </a:solidFill>
+          <a:ln w="12700">
+            <a:solidFill>
+              <a:srgbClr val="B45309"/>
+            </a:solidFill>
+            <a:prstDash val="solid"/>
+          </a:ln>
+        </p:spPr>
+      </p:sp>
+      <p:pic>
+        <p:nvPicPr>
+          <p:cNvPr id="20" name="Image 0" descr="preencoded.png">    </p:cNvPr>
+          <p:cNvPicPr>
+            <a:picLocks noChangeAspect="1"/>
+          </p:cNvPicPr>
+          <p:nvPr/>
+        </p:nvPicPr>
+        <p:blipFill>
+          <a:blip r:embed="rId1"/>
+          <a:stretch>
+            <a:fillRect/>
+          </a:stretch>
+        </p:blipFill>
+        <p:spPr>
+          <a:xfrm>
+            <a:off x="8003616" y="128016"/>
+            <a:ext cx="201168" cy="201168"/>
+          </a:xfrm>
+          <a:prstGeom prst="rect">
+            <a:avLst/>
+          </a:prstGeom>
+        </p:spPr>
+      </p:pic>
+      <p:sp>
+        <p:nvSpPr>
+          <p:cNvPr id="21" name="Text 18"/>
+          <p:cNvSpPr txBox="1"/>
+          <p:nvPr/>
+        </p:nvSpPr>
+        <p:spPr>
+          <a:xfrm>
+            <a:off x="8259648" y="91440"/>
+            <a:ext cx="3346831" cy="274320"/>
+          </a:xfrm>
+          <a:prstGeom prst="rect">
+            <a:avLst/>
+          </a:prstGeom>
+          <a:noFill/>
+          <a:ln/>
+        </p:spPr>
+        <p:txBody>
+          <a:bodyPr wrap="square" lIns="0" tIns="0" rIns="0" bIns="0" rtlCol="0" anchor="ctr"/>
+          <a:lstStyle/>
+          <a:p>
+            <a:pPr indent="0" marL="0">
+              <a:buNone/>
+            </a:pPr>
+            <a:r>
+              <a:rPr lang="en-US" sz="1100" b="1" dirty="0">
+                <a:solidFill>
+                  <a:srgbClr val="92400E"/>
+                </a:solidFill>
+                <a:latin typeface="Calibri" pitchFamily="34" charset="0"/>
+                <a:ea typeface="Calibri" pitchFamily="34" charset="-122"/>
+                <a:cs typeface="Calibri" pitchFamily="34" charset="-120"/>
+              </a:rPr>
+              <a:t>DA UTILIZZARE OGGI</a:t>
+            </a:r>
+            <a:pPr indent="0" marL="0">
+              <a:buNone/>
+            </a:pPr>
+            <a:r>
+              <a:rPr lang="en-US" sz="1100" dirty="0">
+                <a:solidFill>
+                  <a:srgbClr val="92400E"/>
+                </a:solidFill>
+                <a:latin typeface="Calibri" pitchFamily="34" charset="0"/>
+                <a:ea typeface="Calibri" pitchFamily="34" charset="-122"/>
+                <a:cs typeface="Calibri" pitchFamily="34" charset="-120"/>
+              </a:rPr>
+              <a:t> · gli strumenti di PRG32</a:t>
+            </a:r>
+            <a:endParaRPr lang="en-US" sz="1100" dirty="0"/>
+          </a:p>
+        </p:txBody>
+      </p:sp>
+      <p:sp>
+        <p:nvSpPr>
           <p:cNvPr id="25" name="Slide Number Placeholder 0"/>
           <p:cNvSpPr>
             <a:spLocks noGrp="1"/>
@@ -8201,6 +9544,158 @@
                 <a:cs typeface="Calibri" pitchFamily="34" charset="-120"/>
               </a:rPr>
               <a:t>Schermo nero: confrontate il cablaggio del display con il firmware</a:t>
+            </a:r>
+            <a:endParaRPr lang="en-US" sz="1100" dirty="0"/>
+          </a:p>
+        </p:txBody>
+      </p:sp>
+      <p:sp>
+        <p:nvSpPr>
+          <p:cNvPr id="17" name="Shape 15"/>
+          <p:cNvSpPr/>
+          <p:nvPr/>
+        </p:nvSpPr>
+        <p:spPr>
+          <a:xfrm>
+            <a:off x="7875600" y="91440"/>
+            <a:ext cx="3767455" cy="274320"/>
+          </a:xfrm>
+          <a:prstGeom prst="rect">
+            <a:avLst/>
+          </a:prstGeom>
+          <a:solidFill>
+            <a:srgbClr val="FEF3C7"/>
+          </a:solidFill>
+          <a:ln w="12700">
+            <a:solidFill>
+              <a:srgbClr val="B45309"/>
+            </a:solidFill>
+            <a:prstDash val="solid"/>
+          </a:ln>
+        </p:spPr>
+      </p:sp>
+      <p:sp>
+        <p:nvSpPr>
+          <p:cNvPr id="18" name="Shape 16"/>
+          <p:cNvSpPr/>
+          <p:nvPr/>
+        </p:nvSpPr>
+        <p:spPr>
+          <a:xfrm>
+            <a:off x="7875600" y="91440"/>
+            <a:ext cx="27432" cy="274320"/>
+          </a:xfrm>
+          <a:prstGeom prst="rect">
+            <a:avLst/>
+          </a:prstGeom>
+          <a:solidFill>
+            <a:srgbClr val="B45309"/>
+          </a:solidFill>
+          <a:ln w="12700">
+            <a:solidFill>
+              <a:srgbClr val="B45309"/>
+            </a:solidFill>
+            <a:prstDash val="solid"/>
+          </a:ln>
+        </p:spPr>
+      </p:sp>
+      <p:sp>
+        <p:nvSpPr>
+          <p:cNvPr id="19" name="Shape 17"/>
+          <p:cNvSpPr/>
+          <p:nvPr/>
+        </p:nvSpPr>
+        <p:spPr>
+          <a:xfrm>
+            <a:off x="7930464" y="91440"/>
+            <a:ext cx="27432" cy="274320"/>
+          </a:xfrm>
+          <a:prstGeom prst="rect">
+            <a:avLst/>
+          </a:prstGeom>
+          <a:solidFill>
+            <a:srgbClr val="B45309"/>
+          </a:solidFill>
+          <a:ln w="12700">
+            <a:solidFill>
+              <a:srgbClr val="B45309"/>
+            </a:solidFill>
+            <a:prstDash val="solid"/>
+          </a:ln>
+        </p:spPr>
+      </p:sp>
+      <p:pic>
+        <p:nvPicPr>
+          <p:cNvPr id="20" name="Image 0" descr="preencoded.png">    </p:cNvPr>
+          <p:cNvPicPr>
+            <a:picLocks noChangeAspect="1"/>
+          </p:cNvPicPr>
+          <p:nvPr/>
+        </p:nvPicPr>
+        <p:blipFill>
+          <a:blip r:embed="rId1"/>
+          <a:stretch>
+            <a:fillRect/>
+          </a:stretch>
+        </p:blipFill>
+        <p:spPr>
+          <a:xfrm>
+            <a:off x="8003616" y="128016"/>
+            <a:ext cx="201168" cy="201168"/>
+          </a:xfrm>
+          <a:prstGeom prst="rect">
+            <a:avLst/>
+          </a:prstGeom>
+        </p:spPr>
+      </p:pic>
+      <p:sp>
+        <p:nvSpPr>
+          <p:cNvPr id="21" name="Text 18"/>
+          <p:cNvSpPr txBox="1"/>
+          <p:nvPr/>
+        </p:nvSpPr>
+        <p:spPr>
+          <a:xfrm>
+            <a:off x="8259648" y="91440"/>
+            <a:ext cx="3346831" cy="274320"/>
+          </a:xfrm>
+          <a:prstGeom prst="rect">
+            <a:avLst/>
+          </a:prstGeom>
+          <a:noFill/>
+          <a:ln/>
+        </p:spPr>
+        <p:txBody>
+          <a:bodyPr wrap="square" lIns="0" tIns="0" rIns="0" bIns="0" rtlCol="0" anchor="ctr"/>
+          <a:lstStyle/>
+          <a:p>
+            <a:pPr indent="0" marL="0">
+              <a:buNone/>
+            </a:pPr>
+            <a:r>
+              <a:rPr lang="en-US" sz="1100" b="1" dirty="0">
+                <a:solidFill>
+                  <a:srgbClr val="92400E"/>
+                </a:solidFill>
+                <a:latin typeface="Calibri" pitchFamily="34" charset="0"/>
+                <a:ea typeface="Calibri" pitchFamily="34" charset="-122"/>
+                <a:cs typeface="Calibri" pitchFamily="34" charset="-120"/>
+              </a:rPr>
+              <a:t>DA UTILIZZARE OGGI</a:t>
+            </a:r>
+            <a:pPr indent="0" marL="0">
+              <a:buNone/>
+            </a:pPr>
+            <a:r>
+              <a:rPr lang="en-US" sz="1100" dirty="0">
+                <a:solidFill>
+                  <a:srgbClr val="92400E"/>
+                </a:solidFill>
+                <a:latin typeface="Calibri" pitchFamily="34" charset="0"/>
+                <a:ea typeface="Calibri" pitchFamily="34" charset="-122"/>
+                <a:cs typeface="Calibri" pitchFamily="34" charset="-120"/>
+              </a:rPr>
+              <a:t> · gli strumenti di PRG32</a:t>
             </a:r>
             <a:endParaRPr lang="en-US" sz="1100" dirty="0"/>
           </a:p>
@@ -9589,6 +11084,158 @@
       </p:graphicFrame>
       <p:sp>
         <p:nvSpPr>
+          <p:cNvPr id="4" name="Shape 1"/>
+          <p:cNvSpPr/>
+          <p:nvPr/>
+        </p:nvSpPr>
+        <p:spPr>
+          <a:xfrm>
+            <a:off x="7875600" y="91440"/>
+            <a:ext cx="3767455" cy="274320"/>
+          </a:xfrm>
+          <a:prstGeom prst="rect">
+            <a:avLst/>
+          </a:prstGeom>
+          <a:solidFill>
+            <a:srgbClr val="FEF3C7"/>
+          </a:solidFill>
+          <a:ln w="12700">
+            <a:solidFill>
+              <a:srgbClr val="B45309"/>
+            </a:solidFill>
+            <a:prstDash val="solid"/>
+          </a:ln>
+        </p:spPr>
+      </p:sp>
+      <p:sp>
+        <p:nvSpPr>
+          <p:cNvPr id="5" name="Shape 2"/>
+          <p:cNvSpPr/>
+          <p:nvPr/>
+        </p:nvSpPr>
+        <p:spPr>
+          <a:xfrm>
+            <a:off x="7875600" y="91440"/>
+            <a:ext cx="27432" cy="274320"/>
+          </a:xfrm>
+          <a:prstGeom prst="rect">
+            <a:avLst/>
+          </a:prstGeom>
+          <a:solidFill>
+            <a:srgbClr val="B45309"/>
+          </a:solidFill>
+          <a:ln w="12700">
+            <a:solidFill>
+              <a:srgbClr val="B45309"/>
+            </a:solidFill>
+            <a:prstDash val="solid"/>
+          </a:ln>
+        </p:spPr>
+      </p:sp>
+      <p:sp>
+        <p:nvSpPr>
+          <p:cNvPr id="6" name="Shape 3"/>
+          <p:cNvSpPr/>
+          <p:nvPr/>
+        </p:nvSpPr>
+        <p:spPr>
+          <a:xfrm>
+            <a:off x="7930464" y="91440"/>
+            <a:ext cx="27432" cy="274320"/>
+          </a:xfrm>
+          <a:prstGeom prst="rect">
+            <a:avLst/>
+          </a:prstGeom>
+          <a:solidFill>
+            <a:srgbClr val="B45309"/>
+          </a:solidFill>
+          <a:ln w="12700">
+            <a:solidFill>
+              <a:srgbClr val="B45309"/>
+            </a:solidFill>
+            <a:prstDash val="solid"/>
+          </a:ln>
+        </p:spPr>
+      </p:sp>
+      <p:pic>
+        <p:nvPicPr>
+          <p:cNvPr id="7" name="Image 0" descr="preencoded.png">    </p:cNvPr>
+          <p:cNvPicPr>
+            <a:picLocks noChangeAspect="1"/>
+          </p:cNvPicPr>
+          <p:nvPr/>
+        </p:nvPicPr>
+        <p:blipFill>
+          <a:blip r:embed="rId1"/>
+          <a:stretch>
+            <a:fillRect/>
+          </a:stretch>
+        </p:blipFill>
+        <p:spPr>
+          <a:xfrm>
+            <a:off x="8003616" y="128016"/>
+            <a:ext cx="201168" cy="201168"/>
+          </a:xfrm>
+          <a:prstGeom prst="rect">
+            <a:avLst/>
+          </a:prstGeom>
+        </p:spPr>
+      </p:pic>
+      <p:sp>
+        <p:nvSpPr>
+          <p:cNvPr id="8" name="Text 4"/>
+          <p:cNvSpPr txBox="1"/>
+          <p:nvPr/>
+        </p:nvSpPr>
+        <p:spPr>
+          <a:xfrm>
+            <a:off x="8259648" y="91440"/>
+            <a:ext cx="3346831" cy="274320"/>
+          </a:xfrm>
+          <a:prstGeom prst="rect">
+            <a:avLst/>
+          </a:prstGeom>
+          <a:noFill/>
+          <a:ln/>
+        </p:spPr>
+        <p:txBody>
+          <a:bodyPr wrap="square" lIns="0" tIns="0" rIns="0" bIns="0" rtlCol="0" anchor="ctr"/>
+          <a:lstStyle/>
+          <a:p>
+            <a:pPr indent="0" marL="0">
+              <a:buNone/>
+            </a:pPr>
+            <a:r>
+              <a:rPr lang="en-US" sz="1100" b="1" dirty="0">
+                <a:solidFill>
+                  <a:srgbClr val="92400E"/>
+                </a:solidFill>
+                <a:latin typeface="Calibri" pitchFamily="34" charset="0"/>
+                <a:ea typeface="Calibri" pitchFamily="34" charset="-122"/>
+                <a:cs typeface="Calibri" pitchFamily="34" charset="-120"/>
+              </a:rPr>
+              <a:t>DA UTILIZZARE OGGI</a:t>
+            </a:r>
+            <a:pPr indent="0" marL="0">
+              <a:buNone/>
+            </a:pPr>
+            <a:r>
+              <a:rPr lang="en-US" sz="1100" dirty="0">
+                <a:solidFill>
+                  <a:srgbClr val="92400E"/>
+                </a:solidFill>
+                <a:latin typeface="Calibri" pitchFamily="34" charset="0"/>
+                <a:ea typeface="Calibri" pitchFamily="34" charset="-122"/>
+                <a:cs typeface="Calibri" pitchFamily="34" charset="-120"/>
+              </a:rPr>
+              <a:t> · gli strumenti di PRG32</a:t>
+            </a:r>
+            <a:endParaRPr lang="en-US" sz="1100" dirty="0"/>
+          </a:p>
+        </p:txBody>
+      </p:sp>
+      <p:sp>
+        <p:nvSpPr>
           <p:cNvPr id="25" name="Slide Number Placeholder 0"/>
           <p:cNvSpPr>
             <a:spLocks noGrp="1"/>
@@ -11576,6 +13223,133 @@
       </p:sp>
       <p:sp>
         <p:nvSpPr>
+          <p:cNvPr id="17" name="Shape 15"/>
+          <p:cNvSpPr/>
+          <p:nvPr/>
+        </p:nvSpPr>
+        <p:spPr>
+          <a:xfrm>
+            <a:off x="7657668" y="91440"/>
+            <a:ext cx="3985387" cy="274320"/>
+          </a:xfrm>
+          <a:prstGeom prst="rect">
+            <a:avLst/>
+          </a:prstGeom>
+          <a:solidFill>
+            <a:srgbClr val="E0F2FE"/>
+          </a:solidFill>
+          <a:ln w="12700">
+            <a:solidFill>
+              <a:srgbClr val="0369A1"/>
+            </a:solidFill>
+            <a:prstDash val="solid"/>
+          </a:ln>
+        </p:spPr>
+      </p:sp>
+      <p:sp>
+        <p:nvSpPr>
+          <p:cNvPr id="18" name="Shape 16"/>
+          <p:cNvSpPr/>
+          <p:nvPr/>
+        </p:nvSpPr>
+        <p:spPr>
+          <a:xfrm>
+            <a:off x="7657668" y="91440"/>
+            <a:ext cx="73152" cy="274320"/>
+          </a:xfrm>
+          <a:prstGeom prst="rect">
+            <a:avLst/>
+          </a:prstGeom>
+          <a:solidFill>
+            <a:srgbClr val="0369A1"/>
+          </a:solidFill>
+          <a:ln w="12700">
+            <a:solidFill>
+              <a:srgbClr val="0369A1"/>
+            </a:solidFill>
+            <a:prstDash val="solid"/>
+          </a:ln>
+        </p:spPr>
+      </p:sp>
+      <p:pic>
+        <p:nvPicPr>
+          <p:cNvPr id="19" name="Image 0" descr="preencoded.png">    </p:cNvPr>
+          <p:cNvPicPr>
+            <a:picLocks noChangeAspect="1"/>
+          </p:cNvPicPr>
+          <p:nvPr/>
+        </p:nvPicPr>
+        <p:blipFill>
+          <a:blip r:embed="rId1"/>
+          <a:stretch>
+            <a:fillRect/>
+          </a:stretch>
+        </p:blipFill>
+        <p:spPr>
+          <a:xfrm>
+            <a:off x="7785684" y="128016"/>
+            <a:ext cx="201168" cy="201168"/>
+          </a:xfrm>
+          <a:prstGeom prst="rect">
+            <a:avLst/>
+          </a:prstGeom>
+        </p:spPr>
+      </p:pic>
+      <p:sp>
+        <p:nvSpPr>
+          <p:cNvPr id="20" name="Text 17"/>
+          <p:cNvSpPr txBox="1"/>
+          <p:nvPr/>
+        </p:nvSpPr>
+        <p:spPr>
+          <a:xfrm>
+            <a:off x="8041716" y="91440"/>
+            <a:ext cx="3564763" cy="274320"/>
+          </a:xfrm>
+          <a:prstGeom prst="rect">
+            <a:avLst/>
+          </a:prstGeom>
+          <a:noFill/>
+          <a:ln/>
+        </p:spPr>
+        <p:txBody>
+          <a:bodyPr wrap="square" lIns="0" tIns="0" rIns="0" bIns="0" rtlCol="0" anchor="ctr"/>
+          <a:lstStyle/>
+          <a:p>
+            <a:pPr indent="0" marL="0">
+              <a:buNone/>
+            </a:pPr>
+            <a:r>
+              <a:rPr lang="en-US" sz="1100" b="1" dirty="0">
+                <a:solidFill>
+                  <a:srgbClr val="075985"/>
+                </a:solidFill>
+                <a:latin typeface="Calibri" pitchFamily="34" charset="0"/>
+                <a:ea typeface="Calibri" pitchFamily="34" charset="-122"/>
+                <a:cs typeface="Calibri" pitchFamily="34" charset="-120"/>
+              </a:rPr>
+              <a:t>DA COMPRENDERE OGGI</a:t>
+            </a:r>
+            <a:pPr indent="0" marL="0">
+              <a:buNone/>
+            </a:pPr>
+            <a:r>
+              <a:rPr lang="en-US" sz="1100" dirty="0">
+                <a:solidFill>
+                  <a:srgbClr val="075985"/>
+                </a:solidFill>
+                <a:latin typeface="Calibri" pitchFamily="34" charset="0"/>
+                <a:ea typeface="Calibri" pitchFamily="34" charset="-122"/>
+                <a:cs typeface="Calibri" pitchFamily="34" charset="-120"/>
+              </a:rPr>
+              <a:t> · formati delle istruzioni</a:t>
+            </a:r>
+            <a:endParaRPr lang="en-US" sz="1100" dirty="0"/>
+          </a:p>
+        </p:txBody>
+      </p:sp>
+      <p:sp>
+        <p:nvSpPr>
           <p:cNvPr id="25" name="Slide Number Placeholder 0"/>
           <p:cNvSpPr>
             <a:spLocks noGrp="1"/>
@@ -13810,6 +15584,133 @@
               <a:t>0</a:t>
             </a:r>
             <a:endParaRPr lang="en-US" sz="1050" dirty="0"/>
+          </a:p>
+        </p:txBody>
+      </p:sp>
+      <p:sp>
+        <p:nvSpPr>
+          <p:cNvPr id="51" name="Shape 49"/>
+          <p:cNvSpPr/>
+          <p:nvPr/>
+        </p:nvSpPr>
+        <p:spPr>
+          <a:xfrm>
+            <a:off x="7657668" y="91440"/>
+            <a:ext cx="3985387" cy="274320"/>
+          </a:xfrm>
+          <a:prstGeom prst="rect">
+            <a:avLst/>
+          </a:prstGeom>
+          <a:solidFill>
+            <a:srgbClr val="E0F2FE"/>
+          </a:solidFill>
+          <a:ln w="12700">
+            <a:solidFill>
+              <a:srgbClr val="0369A1"/>
+            </a:solidFill>
+            <a:prstDash val="solid"/>
+          </a:ln>
+        </p:spPr>
+      </p:sp>
+      <p:sp>
+        <p:nvSpPr>
+          <p:cNvPr id="52" name="Shape 50"/>
+          <p:cNvSpPr/>
+          <p:nvPr/>
+        </p:nvSpPr>
+        <p:spPr>
+          <a:xfrm>
+            <a:off x="7657668" y="91440"/>
+            <a:ext cx="73152" cy="274320"/>
+          </a:xfrm>
+          <a:prstGeom prst="rect">
+            <a:avLst/>
+          </a:prstGeom>
+          <a:solidFill>
+            <a:srgbClr val="0369A1"/>
+          </a:solidFill>
+          <a:ln w="12700">
+            <a:solidFill>
+              <a:srgbClr val="0369A1"/>
+            </a:solidFill>
+            <a:prstDash val="solid"/>
+          </a:ln>
+        </p:spPr>
+      </p:sp>
+      <p:pic>
+        <p:nvPicPr>
+          <p:cNvPr id="53" name="Image 0" descr="preencoded.png">    </p:cNvPr>
+          <p:cNvPicPr>
+            <a:picLocks noChangeAspect="1"/>
+          </p:cNvPicPr>
+          <p:nvPr/>
+        </p:nvPicPr>
+        <p:blipFill>
+          <a:blip r:embed="rId1"/>
+          <a:stretch>
+            <a:fillRect/>
+          </a:stretch>
+        </p:blipFill>
+        <p:spPr>
+          <a:xfrm>
+            <a:off x="7785684" y="128016"/>
+            <a:ext cx="201168" cy="201168"/>
+          </a:xfrm>
+          <a:prstGeom prst="rect">
+            <a:avLst/>
+          </a:prstGeom>
+        </p:spPr>
+      </p:pic>
+      <p:sp>
+        <p:nvSpPr>
+          <p:cNvPr id="54" name="Text 51"/>
+          <p:cNvSpPr txBox="1"/>
+          <p:nvPr/>
+        </p:nvSpPr>
+        <p:spPr>
+          <a:xfrm>
+            <a:off x="8041716" y="91440"/>
+            <a:ext cx="3564763" cy="274320"/>
+          </a:xfrm>
+          <a:prstGeom prst="rect">
+            <a:avLst/>
+          </a:prstGeom>
+          <a:noFill/>
+          <a:ln/>
+        </p:spPr>
+        <p:txBody>
+          <a:bodyPr wrap="square" lIns="0" tIns="0" rIns="0" bIns="0" rtlCol="0" anchor="ctr"/>
+          <a:lstStyle/>
+          <a:p>
+            <a:pPr indent="0" marL="0">
+              <a:buNone/>
+            </a:pPr>
+            <a:r>
+              <a:rPr lang="en-US" sz="1100" b="1" dirty="0">
+                <a:solidFill>
+                  <a:srgbClr val="075985"/>
+                </a:solidFill>
+                <a:latin typeface="Calibri" pitchFamily="34" charset="0"/>
+                <a:ea typeface="Calibri" pitchFamily="34" charset="-122"/>
+                <a:cs typeface="Calibri" pitchFamily="34" charset="-120"/>
+              </a:rPr>
+              <a:t>DA COMPRENDERE OGGI</a:t>
+            </a:r>
+            <a:pPr indent="0" marL="0">
+              <a:buNone/>
+            </a:pPr>
+            <a:r>
+              <a:rPr lang="en-US" sz="1100" dirty="0">
+                <a:solidFill>
+                  <a:srgbClr val="075985"/>
+                </a:solidFill>
+                <a:latin typeface="Calibri" pitchFamily="34" charset="0"/>
+                <a:ea typeface="Calibri" pitchFamily="34" charset="-122"/>
+                <a:cs typeface="Calibri" pitchFamily="34" charset="-120"/>
+              </a:rPr>
+              <a:t> · formati delle istruzioni</a:t>
+            </a:r>
+            <a:endParaRPr lang="en-US" sz="1100" dirty="0"/>
           </a:p>
         </p:txBody>
       </p:sp>
@@ -14990,6 +16891,133 @@
       </p:graphicFrame>
       <p:sp>
         <p:nvSpPr>
+          <p:cNvPr id="4" name="Shape 1"/>
+          <p:cNvSpPr/>
+          <p:nvPr/>
+        </p:nvSpPr>
+        <p:spPr>
+          <a:xfrm>
+            <a:off x="7723327" y="91440"/>
+            <a:ext cx="3919728" cy="274320"/>
+          </a:xfrm>
+          <a:prstGeom prst="rect">
+            <a:avLst/>
+          </a:prstGeom>
+          <a:solidFill>
+            <a:srgbClr val="E0F2FE"/>
+          </a:solidFill>
+          <a:ln w="12700">
+            <a:solidFill>
+              <a:srgbClr val="0369A1"/>
+            </a:solidFill>
+            <a:prstDash val="solid"/>
+          </a:ln>
+        </p:spPr>
+      </p:sp>
+      <p:sp>
+        <p:nvSpPr>
+          <p:cNvPr id="5" name="Shape 2"/>
+          <p:cNvSpPr/>
+          <p:nvPr/>
+        </p:nvSpPr>
+        <p:spPr>
+          <a:xfrm>
+            <a:off x="7723327" y="91440"/>
+            <a:ext cx="73152" cy="274320"/>
+          </a:xfrm>
+          <a:prstGeom prst="rect">
+            <a:avLst/>
+          </a:prstGeom>
+          <a:solidFill>
+            <a:srgbClr val="0369A1"/>
+          </a:solidFill>
+          <a:ln w="12700">
+            <a:solidFill>
+              <a:srgbClr val="0369A1"/>
+            </a:solidFill>
+            <a:prstDash val="solid"/>
+          </a:ln>
+        </p:spPr>
+      </p:sp>
+      <p:pic>
+        <p:nvPicPr>
+          <p:cNvPr id="6" name="Image 0" descr="preencoded.png">    </p:cNvPr>
+          <p:cNvPicPr>
+            <a:picLocks noChangeAspect="1"/>
+          </p:cNvPicPr>
+          <p:nvPr/>
+        </p:nvPicPr>
+        <p:blipFill>
+          <a:blip r:embed="rId1"/>
+          <a:stretch>
+            <a:fillRect/>
+          </a:stretch>
+        </p:blipFill>
+        <p:spPr>
+          <a:xfrm>
+            <a:off x="7851343" y="128016"/>
+            <a:ext cx="201168" cy="201168"/>
+          </a:xfrm>
+          <a:prstGeom prst="rect">
+            <a:avLst/>
+          </a:prstGeom>
+        </p:spPr>
+      </p:pic>
+      <p:sp>
+        <p:nvSpPr>
+          <p:cNvPr id="7" name="Text 3"/>
+          <p:cNvSpPr txBox="1"/>
+          <p:nvPr/>
+        </p:nvSpPr>
+        <p:spPr>
+          <a:xfrm>
+            <a:off x="8107375" y="91440"/>
+            <a:ext cx="3499104" cy="274320"/>
+          </a:xfrm>
+          <a:prstGeom prst="rect">
+            <a:avLst/>
+          </a:prstGeom>
+          <a:noFill/>
+          <a:ln/>
+        </p:spPr>
+        <p:txBody>
+          <a:bodyPr wrap="square" lIns="0" tIns="0" rIns="0" bIns="0" rtlCol="0" anchor="ctr"/>
+          <a:lstStyle/>
+          <a:p>
+            <a:pPr indent="0" marL="0">
+              <a:buNone/>
+            </a:pPr>
+            <a:r>
+              <a:rPr lang="en-US" sz="1100" b="1" dirty="0">
+                <a:solidFill>
+                  <a:srgbClr val="075985"/>
+                </a:solidFill>
+                <a:latin typeface="Calibri" pitchFamily="34" charset="0"/>
+                <a:ea typeface="Calibri" pitchFamily="34" charset="-122"/>
+                <a:cs typeface="Calibri" pitchFamily="34" charset="-120"/>
+              </a:rPr>
+              <a:t>DA COMPRENDERE OGGI</a:t>
+            </a:r>
+            <a:pPr indent="0" marL="0">
+              <a:buNone/>
+            </a:pPr>
+            <a:r>
+              <a:rPr lang="en-US" sz="1100" dirty="0">
+                <a:solidFill>
+                  <a:srgbClr val="075985"/>
+                </a:solidFill>
+                <a:latin typeface="Calibri" pitchFamily="34" charset="0"/>
+                <a:ea typeface="Calibri" pitchFamily="34" charset="-122"/>
+                <a:cs typeface="Calibri" pitchFamily="34" charset="-120"/>
+              </a:rPr>
+              <a:t> · il ciclo del processore</a:t>
+            </a:r>
+            <a:endParaRPr lang="en-US" sz="1100" dirty="0"/>
+          </a:p>
+        </p:txBody>
+      </p:sp>
+      <p:sp>
+        <p:nvSpPr>
           <p:cNvPr id="25" name="Slide Number Placeholder 0"/>
           <p:cNvSpPr>
             <a:spLocks noGrp="1"/>
@@ -16204,6 +18232,133 @@
       </p:sp>
       <p:sp>
         <p:nvSpPr>
+          <p:cNvPr id="5" name="Shape 2"/>
+          <p:cNvSpPr/>
+          <p:nvPr/>
+        </p:nvSpPr>
+        <p:spPr>
+          <a:xfrm>
+            <a:off x="7723327" y="91440"/>
+            <a:ext cx="3919728" cy="274320"/>
+          </a:xfrm>
+          <a:prstGeom prst="rect">
+            <a:avLst/>
+          </a:prstGeom>
+          <a:solidFill>
+            <a:srgbClr val="E0F2FE"/>
+          </a:solidFill>
+          <a:ln w="12700">
+            <a:solidFill>
+              <a:srgbClr val="0369A1"/>
+            </a:solidFill>
+            <a:prstDash val="solid"/>
+          </a:ln>
+        </p:spPr>
+      </p:sp>
+      <p:sp>
+        <p:nvSpPr>
+          <p:cNvPr id="6" name="Shape 3"/>
+          <p:cNvSpPr/>
+          <p:nvPr/>
+        </p:nvSpPr>
+        <p:spPr>
+          <a:xfrm>
+            <a:off x="7723327" y="91440"/>
+            <a:ext cx="73152" cy="274320"/>
+          </a:xfrm>
+          <a:prstGeom prst="rect">
+            <a:avLst/>
+          </a:prstGeom>
+          <a:solidFill>
+            <a:srgbClr val="0369A1"/>
+          </a:solidFill>
+          <a:ln w="12700">
+            <a:solidFill>
+              <a:srgbClr val="0369A1"/>
+            </a:solidFill>
+            <a:prstDash val="solid"/>
+          </a:ln>
+        </p:spPr>
+      </p:sp>
+      <p:pic>
+        <p:nvPicPr>
+          <p:cNvPr id="7" name="Image 0" descr="preencoded.png">    </p:cNvPr>
+          <p:cNvPicPr>
+            <a:picLocks noChangeAspect="1"/>
+          </p:cNvPicPr>
+          <p:nvPr/>
+        </p:nvPicPr>
+        <p:blipFill>
+          <a:blip r:embed="rId1"/>
+          <a:stretch>
+            <a:fillRect/>
+          </a:stretch>
+        </p:blipFill>
+        <p:spPr>
+          <a:xfrm>
+            <a:off x="7851343" y="128016"/>
+            <a:ext cx="201168" cy="201168"/>
+          </a:xfrm>
+          <a:prstGeom prst="rect">
+            <a:avLst/>
+          </a:prstGeom>
+        </p:spPr>
+      </p:pic>
+      <p:sp>
+        <p:nvSpPr>
+          <p:cNvPr id="8" name="Text 4"/>
+          <p:cNvSpPr txBox="1"/>
+          <p:nvPr/>
+        </p:nvSpPr>
+        <p:spPr>
+          <a:xfrm>
+            <a:off x="8107375" y="91440"/>
+            <a:ext cx="3499104" cy="274320"/>
+          </a:xfrm>
+          <a:prstGeom prst="rect">
+            <a:avLst/>
+          </a:prstGeom>
+          <a:noFill/>
+          <a:ln/>
+        </p:spPr>
+        <p:txBody>
+          <a:bodyPr wrap="square" lIns="0" tIns="0" rIns="0" bIns="0" rtlCol="0" anchor="ctr"/>
+          <a:lstStyle/>
+          <a:p>
+            <a:pPr indent="0" marL="0">
+              <a:buNone/>
+            </a:pPr>
+            <a:r>
+              <a:rPr lang="en-US" sz="1100" b="1" dirty="0">
+                <a:solidFill>
+                  <a:srgbClr val="075985"/>
+                </a:solidFill>
+                <a:latin typeface="Calibri" pitchFamily="34" charset="0"/>
+                <a:ea typeface="Calibri" pitchFamily="34" charset="-122"/>
+                <a:cs typeface="Calibri" pitchFamily="34" charset="-120"/>
+              </a:rPr>
+              <a:t>DA COMPRENDERE OGGI</a:t>
+            </a:r>
+            <a:pPr indent="0" marL="0">
+              <a:buNone/>
+            </a:pPr>
+            <a:r>
+              <a:rPr lang="en-US" sz="1100" dirty="0">
+                <a:solidFill>
+                  <a:srgbClr val="075985"/>
+                </a:solidFill>
+                <a:latin typeface="Calibri" pitchFamily="34" charset="0"/>
+                <a:ea typeface="Calibri" pitchFamily="34" charset="-122"/>
+                <a:cs typeface="Calibri" pitchFamily="34" charset="-120"/>
+              </a:rPr>
+              <a:t> · il ciclo del processore</a:t>
+            </a:r>
+            <a:endParaRPr lang="en-US" sz="1100" dirty="0"/>
+          </a:p>
+        </p:txBody>
+      </p:sp>
+      <p:sp>
+        <p:nvSpPr>
           <p:cNvPr id="25" name="Slide Number Placeholder 0"/>
           <p:cNvSpPr>
             <a:spLocks noGrp="1"/>
@@ -17124,6 +19279,133 @@
       </p:sp>
       <p:sp>
         <p:nvSpPr>
+          <p:cNvPr id="17" name="Shape 15"/>
+          <p:cNvSpPr/>
+          <p:nvPr/>
+        </p:nvSpPr>
+        <p:spPr>
+          <a:xfrm>
+            <a:off x="7985963" y="91440"/>
+            <a:ext cx="3657092" cy="274320"/>
+          </a:xfrm>
+          <a:prstGeom prst="rect">
+            <a:avLst/>
+          </a:prstGeom>
+          <a:solidFill>
+            <a:srgbClr val="E0F2FE"/>
+          </a:solidFill>
+          <a:ln w="12700">
+            <a:solidFill>
+              <a:srgbClr val="0369A1"/>
+            </a:solidFill>
+            <a:prstDash val="solid"/>
+          </a:ln>
+        </p:spPr>
+      </p:sp>
+      <p:sp>
+        <p:nvSpPr>
+          <p:cNvPr id="18" name="Shape 16"/>
+          <p:cNvSpPr/>
+          <p:nvPr/>
+        </p:nvSpPr>
+        <p:spPr>
+          <a:xfrm>
+            <a:off x="7985963" y="91440"/>
+            <a:ext cx="73152" cy="274320"/>
+          </a:xfrm>
+          <a:prstGeom prst="rect">
+            <a:avLst/>
+          </a:prstGeom>
+          <a:solidFill>
+            <a:srgbClr val="0369A1"/>
+          </a:solidFill>
+          <a:ln w="12700">
+            <a:solidFill>
+              <a:srgbClr val="0369A1"/>
+            </a:solidFill>
+            <a:prstDash val="solid"/>
+          </a:ln>
+        </p:spPr>
+      </p:sp>
+      <p:pic>
+        <p:nvPicPr>
+          <p:cNvPr id="19" name="Image 0" descr="preencoded.png">    </p:cNvPr>
+          <p:cNvPicPr>
+            <a:picLocks noChangeAspect="1"/>
+          </p:cNvPicPr>
+          <p:nvPr/>
+        </p:nvPicPr>
+        <p:blipFill>
+          <a:blip r:embed="rId1"/>
+          <a:stretch>
+            <a:fillRect/>
+          </a:stretch>
+        </p:blipFill>
+        <p:spPr>
+          <a:xfrm>
+            <a:off x="8113979" y="128016"/>
+            <a:ext cx="201168" cy="201168"/>
+          </a:xfrm>
+          <a:prstGeom prst="rect">
+            <a:avLst/>
+          </a:prstGeom>
+        </p:spPr>
+      </p:pic>
+      <p:sp>
+        <p:nvSpPr>
+          <p:cNvPr id="20" name="Text 17"/>
+          <p:cNvSpPr txBox="1"/>
+          <p:nvPr/>
+        </p:nvSpPr>
+        <p:spPr>
+          <a:xfrm>
+            <a:off x="8370011" y="91440"/>
+            <a:ext cx="3236468" cy="274320"/>
+          </a:xfrm>
+          <a:prstGeom prst="rect">
+            <a:avLst/>
+          </a:prstGeom>
+          <a:noFill/>
+          <a:ln/>
+        </p:spPr>
+        <p:txBody>
+          <a:bodyPr wrap="square" lIns="0" tIns="0" rIns="0" bIns="0" rtlCol="0" anchor="ctr"/>
+          <a:lstStyle/>
+          <a:p>
+            <a:pPr indent="0" marL="0">
+              <a:buNone/>
+            </a:pPr>
+            <a:r>
+              <a:rPr lang="en-US" sz="1100" b="1" dirty="0">
+                <a:solidFill>
+                  <a:srgbClr val="075985"/>
+                </a:solidFill>
+                <a:latin typeface="Calibri" pitchFamily="34" charset="0"/>
+                <a:ea typeface="Calibri" pitchFamily="34" charset="-122"/>
+                <a:cs typeface="Calibri" pitchFamily="34" charset="-120"/>
+              </a:rPr>
+              <a:t>DA COMPRENDERE OGGI</a:t>
+            </a:r>
+            <a:pPr indent="0" marL="0">
+              <a:buNone/>
+            </a:pPr>
+            <a:r>
+              <a:rPr lang="en-US" sz="1100" dirty="0">
+                <a:solidFill>
+                  <a:srgbClr val="075985"/>
+                </a:solidFill>
+                <a:latin typeface="Calibri" pitchFamily="34" charset="0"/>
+                <a:ea typeface="Calibri" pitchFamily="34" charset="-122"/>
+                <a:cs typeface="Calibri" pitchFamily="34" charset="-120"/>
+              </a:rPr>
+              <a:t> · interruzioni e trap</a:t>
+            </a:r>
+            <a:endParaRPr lang="en-US" sz="1100" dirty="0"/>
+          </a:p>
+        </p:txBody>
+      </p:sp>
+      <p:sp>
+        <p:nvSpPr>
           <p:cNvPr id="25" name="Slide Number Placeholder 0"/>
           <p:cNvSpPr>
             <a:spLocks noGrp="1"/>
@@ -17678,6 +19960,158 @@
       </p:sp>
       <p:sp>
         <p:nvSpPr>
+          <p:cNvPr id="5" name="Shape 3"/>
+          <p:cNvSpPr/>
+          <p:nvPr/>
+        </p:nvSpPr>
+        <p:spPr>
+          <a:xfrm>
+            <a:off x="7941259" y="91440"/>
+            <a:ext cx="3701796" cy="274320"/>
+          </a:xfrm>
+          <a:prstGeom prst="rect">
+            <a:avLst/>
+          </a:prstGeom>
+          <a:solidFill>
+            <a:srgbClr val="FEF3C7"/>
+          </a:solidFill>
+          <a:ln w="12700">
+            <a:solidFill>
+              <a:srgbClr val="B45309"/>
+            </a:solidFill>
+            <a:prstDash val="solid"/>
+          </a:ln>
+        </p:spPr>
+      </p:sp>
+      <p:sp>
+        <p:nvSpPr>
+          <p:cNvPr id="6" name="Shape 4"/>
+          <p:cNvSpPr/>
+          <p:nvPr/>
+        </p:nvSpPr>
+        <p:spPr>
+          <a:xfrm>
+            <a:off x="7941259" y="91440"/>
+            <a:ext cx="27432" cy="274320"/>
+          </a:xfrm>
+          <a:prstGeom prst="rect">
+            <a:avLst/>
+          </a:prstGeom>
+          <a:solidFill>
+            <a:srgbClr val="B45309"/>
+          </a:solidFill>
+          <a:ln w="12700">
+            <a:solidFill>
+              <a:srgbClr val="B45309"/>
+            </a:solidFill>
+            <a:prstDash val="solid"/>
+          </a:ln>
+        </p:spPr>
+      </p:sp>
+      <p:sp>
+        <p:nvSpPr>
+          <p:cNvPr id="7" name="Shape 5"/>
+          <p:cNvSpPr/>
+          <p:nvPr/>
+        </p:nvSpPr>
+        <p:spPr>
+          <a:xfrm>
+            <a:off x="7996123" y="91440"/>
+            <a:ext cx="27432" cy="274320"/>
+          </a:xfrm>
+          <a:prstGeom prst="rect">
+            <a:avLst/>
+          </a:prstGeom>
+          <a:solidFill>
+            <a:srgbClr val="B45309"/>
+          </a:solidFill>
+          <a:ln w="12700">
+            <a:solidFill>
+              <a:srgbClr val="B45309"/>
+            </a:solidFill>
+            <a:prstDash val="solid"/>
+          </a:ln>
+        </p:spPr>
+      </p:sp>
+      <p:pic>
+        <p:nvPicPr>
+          <p:cNvPr id="8" name="Image 0" descr="preencoded.png">    </p:cNvPr>
+          <p:cNvPicPr>
+            <a:picLocks noChangeAspect="1"/>
+          </p:cNvPicPr>
+          <p:nvPr/>
+        </p:nvPicPr>
+        <p:blipFill>
+          <a:blip r:embed="rId1"/>
+          <a:stretch>
+            <a:fillRect/>
+          </a:stretch>
+        </p:blipFill>
+        <p:spPr>
+          <a:xfrm>
+            <a:off x="8069275" y="128016"/>
+            <a:ext cx="201168" cy="201168"/>
+          </a:xfrm>
+          <a:prstGeom prst="rect">
+            <a:avLst/>
+          </a:prstGeom>
+        </p:spPr>
+      </p:pic>
+      <p:sp>
+        <p:nvSpPr>
+          <p:cNvPr id="9" name="Text 6"/>
+          <p:cNvSpPr txBox="1"/>
+          <p:nvPr/>
+        </p:nvSpPr>
+        <p:spPr>
+          <a:xfrm>
+            <a:off x="8325307" y="91440"/>
+            <a:ext cx="3281172" cy="274320"/>
+          </a:xfrm>
+          <a:prstGeom prst="rect">
+            <a:avLst/>
+          </a:prstGeom>
+          <a:noFill/>
+          <a:ln/>
+        </p:spPr>
+        <p:txBody>
+          <a:bodyPr wrap="square" lIns="0" tIns="0" rIns="0" bIns="0" rtlCol="0" anchor="ctr"/>
+          <a:lstStyle/>
+          <a:p>
+            <a:pPr indent="0" marL="0">
+              <a:buNone/>
+            </a:pPr>
+            <a:r>
+              <a:rPr lang="en-US" sz="1100" b="1" dirty="0">
+                <a:solidFill>
+                  <a:srgbClr val="92400E"/>
+                </a:solidFill>
+                <a:latin typeface="Calibri" pitchFamily="34" charset="0"/>
+                <a:ea typeface="Calibri" pitchFamily="34" charset="-122"/>
+                <a:cs typeface="Calibri" pitchFamily="34" charset="-120"/>
+              </a:rPr>
+              <a:t>DA UTILIZZARE OGGI</a:t>
+            </a:r>
+            <a:pPr indent="0" marL="0">
+              <a:buNone/>
+            </a:pPr>
+            <a:r>
+              <a:rPr lang="en-US" sz="1100" dirty="0">
+                <a:solidFill>
+                  <a:srgbClr val="92400E"/>
+                </a:solidFill>
+                <a:latin typeface="Calibri" pitchFamily="34" charset="0"/>
+                <a:ea typeface="Calibri" pitchFamily="34" charset="-122"/>
+                <a:cs typeface="Calibri" pitchFamily="34" charset="-120"/>
+              </a:rPr>
+              <a:t> · il programma completo</a:t>
+            </a:r>
+            <a:endParaRPr lang="en-US" sz="1100" dirty="0"/>
+          </a:p>
+        </p:txBody>
+      </p:sp>
+      <p:sp>
+        <p:nvSpPr>
           <p:cNvPr id="25" name="Slide Number Placeholder 0"/>
           <p:cNvSpPr>
             <a:spLocks noGrp="1"/>
@@ -18096,6 +20530,158 @@
               <a:t>.option pop</a:t>
             </a:r>
             <a:endParaRPr lang="en-US" sz="1800" dirty="0"/>
+          </a:p>
+        </p:txBody>
+      </p:sp>
+      <p:sp>
+        <p:nvSpPr>
+          <p:cNvPr id="5" name="Shape 3"/>
+          <p:cNvSpPr/>
+          <p:nvPr/>
+        </p:nvSpPr>
+        <p:spPr>
+          <a:xfrm>
+            <a:off x="7941259" y="91440"/>
+            <a:ext cx="3701796" cy="274320"/>
+          </a:xfrm>
+          <a:prstGeom prst="rect">
+            <a:avLst/>
+          </a:prstGeom>
+          <a:solidFill>
+            <a:srgbClr val="FEF3C7"/>
+          </a:solidFill>
+          <a:ln w="12700">
+            <a:solidFill>
+              <a:srgbClr val="B45309"/>
+            </a:solidFill>
+            <a:prstDash val="solid"/>
+          </a:ln>
+        </p:spPr>
+      </p:sp>
+      <p:sp>
+        <p:nvSpPr>
+          <p:cNvPr id="6" name="Shape 4"/>
+          <p:cNvSpPr/>
+          <p:nvPr/>
+        </p:nvSpPr>
+        <p:spPr>
+          <a:xfrm>
+            <a:off x="7941259" y="91440"/>
+            <a:ext cx="27432" cy="274320"/>
+          </a:xfrm>
+          <a:prstGeom prst="rect">
+            <a:avLst/>
+          </a:prstGeom>
+          <a:solidFill>
+            <a:srgbClr val="B45309"/>
+          </a:solidFill>
+          <a:ln w="12700">
+            <a:solidFill>
+              <a:srgbClr val="B45309"/>
+            </a:solidFill>
+            <a:prstDash val="solid"/>
+          </a:ln>
+        </p:spPr>
+      </p:sp>
+      <p:sp>
+        <p:nvSpPr>
+          <p:cNvPr id="7" name="Shape 5"/>
+          <p:cNvSpPr/>
+          <p:nvPr/>
+        </p:nvSpPr>
+        <p:spPr>
+          <a:xfrm>
+            <a:off x="7996123" y="91440"/>
+            <a:ext cx="27432" cy="274320"/>
+          </a:xfrm>
+          <a:prstGeom prst="rect">
+            <a:avLst/>
+          </a:prstGeom>
+          <a:solidFill>
+            <a:srgbClr val="B45309"/>
+          </a:solidFill>
+          <a:ln w="12700">
+            <a:solidFill>
+              <a:srgbClr val="B45309"/>
+            </a:solidFill>
+            <a:prstDash val="solid"/>
+          </a:ln>
+        </p:spPr>
+      </p:sp>
+      <p:pic>
+        <p:nvPicPr>
+          <p:cNvPr id="8" name="Image 0" descr="preencoded.png">    </p:cNvPr>
+          <p:cNvPicPr>
+            <a:picLocks noChangeAspect="1"/>
+          </p:cNvPicPr>
+          <p:nvPr/>
+        </p:nvPicPr>
+        <p:blipFill>
+          <a:blip r:embed="rId1"/>
+          <a:stretch>
+            <a:fillRect/>
+          </a:stretch>
+        </p:blipFill>
+        <p:spPr>
+          <a:xfrm>
+            <a:off x="8069275" y="128016"/>
+            <a:ext cx="201168" cy="201168"/>
+          </a:xfrm>
+          <a:prstGeom prst="rect">
+            <a:avLst/>
+          </a:prstGeom>
+        </p:spPr>
+      </p:pic>
+      <p:sp>
+        <p:nvSpPr>
+          <p:cNvPr id="9" name="Text 6"/>
+          <p:cNvSpPr txBox="1"/>
+          <p:nvPr/>
+        </p:nvSpPr>
+        <p:spPr>
+          <a:xfrm>
+            <a:off x="8325307" y="91440"/>
+            <a:ext cx="3281172" cy="274320"/>
+          </a:xfrm>
+          <a:prstGeom prst="rect">
+            <a:avLst/>
+          </a:prstGeom>
+          <a:noFill/>
+          <a:ln/>
+        </p:spPr>
+        <p:txBody>
+          <a:bodyPr wrap="square" lIns="0" tIns="0" rIns="0" bIns="0" rtlCol="0" anchor="ctr"/>
+          <a:lstStyle/>
+          <a:p>
+            <a:pPr indent="0" marL="0">
+              <a:buNone/>
+            </a:pPr>
+            <a:r>
+              <a:rPr lang="en-US" sz="1100" b="1" dirty="0">
+                <a:solidFill>
+                  <a:srgbClr val="92400E"/>
+                </a:solidFill>
+                <a:latin typeface="Calibri" pitchFamily="34" charset="0"/>
+                <a:ea typeface="Calibri" pitchFamily="34" charset="-122"/>
+                <a:cs typeface="Calibri" pitchFamily="34" charset="-120"/>
+              </a:rPr>
+              <a:t>DA UTILIZZARE OGGI</a:t>
+            </a:r>
+            <a:pPr indent="0" marL="0">
+              <a:buNone/>
+            </a:pPr>
+            <a:r>
+              <a:rPr lang="en-US" sz="1100" dirty="0">
+                <a:solidFill>
+                  <a:srgbClr val="92400E"/>
+                </a:solidFill>
+                <a:latin typeface="Calibri" pitchFamily="34" charset="0"/>
+                <a:ea typeface="Calibri" pitchFamily="34" charset="-122"/>
+                <a:cs typeface="Calibri" pitchFamily="34" charset="-120"/>
+              </a:rPr>
+              <a:t> · il programma completo</a:t>
+            </a:r>
+            <a:endParaRPr lang="en-US" sz="1100" dirty="0"/>
           </a:p>
         </p:txBody>
       </p:sp>

--- a/it/slides/19-Architettura_dei_Calcolatori-Istruzioni_e_Interruzioni-Codice.pptx
+++ b/it/slides/19-Architettura_dei_Calcolatori-Istruzioni_e_Interruzioni-Codice.pptx
@@ -125,34 +125,34 @@
   <p:extLst>
     <p:ext uri="{521415D9-36F7-43E2-AB2F-B90AF26B5E84}">
       <p14:sectionLst xmlns:p14="http://schemas.microsoft.com/office/powerpoint/2010/main">
-        <p14:section name="Apertura" id="{02aae241-700b-d46a-e7ae-7897728b4ad5}">
+        <p14:section name="Apertura" id="{c3363168-0681-755f-8136-45cfc1c201e1}">
           <p14:sldIdLst>
             <p14:sldId id="256"/>
             <p14:sldId id="257"/>
           </p14:sldIdLst>
         </p14:section>
-        <p14:section name="Riscaldamento sulla macchina" id="{2c3ccb28-0adb-af94-a831-da66f0069684}">
+        <p14:section name="Riscaldamento sulla macchina" id="{294c78f1-8e92-5866-ad8f-ab7120777172}">
           <p14:sldIdLst>
             <p14:sldId id="258"/>
           </p14:sldIdLst>
         </p14:section>
-        <p14:section name="Istruzioni" id="{2dd6e6e3-b3ea-29c7-f2ae-a1dc083a25fd}">
+        <p14:section name="Istruzioni" id="{e2ea7317-1e61-487a-a582-b4359f9c8d63}">
           <p14:sldIdLst>
             <p14:sldId id="259"/>
           </p14:sldIdLst>
         </p14:section>
-        <p14:section name="Il ciclo del processore" id="{fb954b71-8617-7bc5-7a66-64cfb2701fc8}">
+        <p14:section name="Il ciclo del processore" id="{b2d2db8a-5d75-30bf-e685-c030dd549a1a}">
           <p14:sldIdLst>
             <p14:sldId id="260"/>
             <p14:sldId id="261"/>
           </p14:sldIdLst>
         </p14:section>
-        <p14:section name="La soluzione di RISC-V" id="{1060664a-ecc9-944a-e31c-c779992ceb57}">
+        <p14:section name="La soluzione di RISC-V" id="{0f7adb99-5a0b-58c5-e3bb-1168f245d42d}">
           <p14:sldIdLst>
             <p14:sldId id="262"/>
           </p14:sldIdLst>
         </p14:section>
-        <p14:section name="Il programma completo" id="{862c38c0-4ac1-3a4b-b3a7-9409406729a5}">
+        <p14:section name="Il programma completo" id="{e8caa52d-499a-615a-b203-79851af752b8}">
           <p14:sldIdLst>
             <p14:sldId id="263"/>
             <p14:sldId id="264"/>
@@ -162,7 +162,7 @@
             <p14:sldId id="268"/>
           </p14:sldIdLst>
         </p14:section>
-        <p14:section name="Eseguire e provare" id="{c088a353-c8f8-5e87-88dc-c3d2d4e9a123}">
+        <p14:section name="Eseguire e provare" id="{4e0d9a53-6912-479d-c2c4-fddfe3cedc29}">
           <p14:sldIdLst>
             <p14:sldId id="269"/>
             <p14:sldId id="270"/>
@@ -171,7 +171,7 @@
             <p14:sldId id="273"/>
           </p14:sldIdLst>
         </p14:section>
-        <p14:section name="Esercizi" id="{9a955ecb-48a3-0e32-cda0-4066cd989164}">
+        <p14:section name="Esercizi" id="{b2e4b6f8-f919-189c-9f5c-7ed64f35e33c}">
           <p14:sldIdLst>
             <p14:sldId id="274"/>
           </p14:sldIdLst>
